--- a/ppt/SrinidhiVutkoori_X25173243_cold-chain-logistics.pptx
+++ b/ppt/SrinidhiVutkoori_X25173243_cold-chain-logistics.pptx
@@ -1150,20 +1150,59 @@
         </p:nvSpPr>
         <p:spPr>
           <a:xfrm>
-            <a:off x="640080" y="914400"/>
-            <a:ext cx="10972800" cy="1280160"/>
-          </a:xfrm>
-          <a:prstGeom prst="rect">
-            <a:avLst/>
-          </a:prstGeom>
-          <a:noFill/>
-          <a:ln/>
-        </p:spPr>
-        <p:txBody>
-          <a:bodyPr wrap="square" rtlCol="0" anchor="t"/>
-          <a:lstStyle/>
-          <a:p>
-            <a:pPr algn="l" indent="0" marL="0">
+            <a:off x="658368" y="640080"/>
+            <a:ext cx="10972800" cy="365760"/>
+          </a:xfrm>
+          <a:prstGeom prst="rect">
+            <a:avLst/>
+          </a:prstGeom>
+          <a:noFill/>
+          <a:ln/>
+        </p:spPr>
+        <p:txBody>
+          <a:bodyPr wrap="square" rtlCol="0" anchor="ctr"/>
+          <a:lstStyle/>
+          <a:p>
+            <a:pPr indent="0" marL="0">
+              <a:buNone/>
+            </a:pPr>
+            <a:r>
+              <a:rPr lang="en-US" sz="1400" b="1" spc="300" kern="0" dirty="0">
+                <a:solidFill>
+                  <a:srgbClr val="E1A93C"/>
+                </a:solidFill>
+                <a:latin typeface="Calibri" pitchFamily="34" charset="0"/>
+                <a:ea typeface="Calibri" pitchFamily="34" charset="-122"/>
+                <a:cs typeface="Calibri" pitchFamily="34" charset="-120"/>
+              </a:rPr>
+              <a:t>COLD CHAIN LOGISTICS MONITORING</a:t>
+            </a:r>
+            <a:endParaRPr lang="en-US" sz="1400" dirty="0"/>
+          </a:p>
+        </p:txBody>
+      </p:sp>
+      <p:sp>
+        <p:nvSpPr>
+          <p:cNvPr id="3" name="Text 1"/>
+          <p:cNvSpPr/>
+          <p:nvPr/>
+        </p:nvSpPr>
+        <p:spPr>
+          <a:xfrm>
+            <a:off x="640080" y="2514600"/>
+            <a:ext cx="10972800" cy="1188720"/>
+          </a:xfrm>
+          <a:prstGeom prst="rect">
+            <a:avLst/>
+          </a:prstGeom>
+          <a:noFill/>
+          <a:ln/>
+        </p:spPr>
+        <p:txBody>
+          <a:bodyPr wrap="square" rtlCol="0" anchor="ctr"/>
+          <a:lstStyle/>
+          <a:p>
+            <a:pPr indent="0" marL="0">
               <a:buNone/>
             </a:pPr>
             <a:r>
@@ -1183,13 +1222,13 @@
       </p:sp>
       <p:sp>
         <p:nvSpPr>
-          <p:cNvPr id="3" name="Text 1"/>
-          <p:cNvSpPr/>
-          <p:nvPr/>
-        </p:nvSpPr>
-        <p:spPr>
-          <a:xfrm>
-            <a:off x="658368" y="2148840"/>
+          <p:cNvPr id="4" name="Text 2"/>
+          <p:cNvSpPr/>
+          <p:nvPr/>
+        </p:nvSpPr>
+        <p:spPr>
+          <a:xfrm>
+            <a:off x="658368" y="3703320"/>
             <a:ext cx="10972800" cy="365760"/>
           </a:xfrm>
           <a:prstGeom prst="rect">
@@ -1222,14 +1261,14 @@
       </p:sp>
       <p:sp>
         <p:nvSpPr>
-          <p:cNvPr id="4" name="Text 2"/>
-          <p:cNvSpPr/>
-          <p:nvPr/>
-        </p:nvSpPr>
-        <p:spPr>
-          <a:xfrm>
-            <a:off x="658368" y="2697480"/>
-            <a:ext cx="10424160" cy="1371600"/>
+          <p:cNvPr id="5" name="Text 3"/>
+          <p:cNvSpPr/>
+          <p:nvPr/>
+        </p:nvSpPr>
+        <p:spPr>
+          <a:xfrm>
+            <a:off x="658368" y="4251960"/>
+            <a:ext cx="10424160" cy="1188720"/>
           </a:xfrm>
           <a:prstGeom prst="rect">
             <a:avLst/>
@@ -1243,12 +1282,12 @@
           <a:p>
             <a:pPr indent="0" marL="0">
               <a:lnSpc>
-                <a:spcPct val="110000"/>
+                <a:spcPct val="108000"/>
               </a:lnSpc>
               <a:buNone/>
             </a:pPr>
             <a:r>
-              <a:rPr lang="en-US" sz="2000" dirty="0">
+              <a:rPr lang="en-US" sz="1800" dirty="0">
                 <a:solidFill>
                   <a:srgbClr val="CFE0EC"/>
                 </a:solidFill>
@@ -1258,19 +1297,19 @@
               </a:rPr>
               <a:t>A reefer whose window-average temperature drifts above minus fifteen is already breaching the cold chain — and a clipboard round discovers it only after the load has spoiled.</a:t>
             </a:r>
-            <a:endParaRPr lang="en-US" sz="2000" dirty="0"/>
-          </a:p>
-        </p:txBody>
-      </p:sp>
-      <p:sp>
-        <p:nvSpPr>
-          <p:cNvPr id="5" name="Shape 3"/>
-          <p:cNvSpPr/>
-          <p:nvPr/>
-        </p:nvSpPr>
-        <p:spPr>
-          <a:xfrm>
-            <a:off x="658368" y="4206240"/>
+            <a:endParaRPr lang="en-US" sz="1800" dirty="0"/>
+          </a:p>
+        </p:txBody>
+      </p:sp>
+      <p:sp>
+        <p:nvSpPr>
+          <p:cNvPr id="6" name="Shape 4"/>
+          <p:cNvSpPr/>
+          <p:nvPr/>
+        </p:nvSpPr>
+        <p:spPr>
+          <a:xfrm>
+            <a:off x="658368" y="5623560"/>
             <a:ext cx="2651760" cy="566928"/>
           </a:xfrm>
           <a:prstGeom prst="roundRect">
@@ -1291,13 +1330,13 @@
       </p:sp>
       <p:sp>
         <p:nvSpPr>
-          <p:cNvPr id="6" name="Text 4"/>
-          <p:cNvSpPr/>
-          <p:nvPr/>
-        </p:nvSpPr>
-        <p:spPr>
-          <a:xfrm>
-            <a:off x="658368" y="4206240"/>
+          <p:cNvPr id="7" name="Text 5"/>
+          <p:cNvSpPr/>
+          <p:nvPr/>
+        </p:nvSpPr>
+        <p:spPr>
+          <a:xfrm>
+            <a:off x="658368" y="5623560"/>
             <a:ext cx="2651760" cy="566928"/>
           </a:xfrm>
           <a:prstGeom prst="rect">
@@ -1314,7 +1353,7 @@
               <a:buNone/>
             </a:pPr>
             <a:r>
-              <a:rPr lang="en-US" sz="1400" b="1" dirty="0">
+              <a:rPr lang="en-US" sz="1350" b="1" dirty="0">
                 <a:solidFill>
                   <a:srgbClr val="E1A93C"/>
                 </a:solidFill>
@@ -1324,19 +1363,19 @@
               </a:rPr>
               <a:t>Storage temp &gt; −15 °C</a:t>
             </a:r>
-            <a:endParaRPr lang="en-US" sz="1400" dirty="0"/>
-          </a:p>
-        </p:txBody>
-      </p:sp>
-      <p:sp>
-        <p:nvSpPr>
-          <p:cNvPr id="7" name="Shape 5"/>
-          <p:cNvSpPr/>
-          <p:nvPr/>
-        </p:nvSpPr>
-        <p:spPr>
-          <a:xfrm>
-            <a:off x="3538728" y="4206240"/>
+            <a:endParaRPr lang="en-US" sz="1350" dirty="0"/>
+          </a:p>
+        </p:txBody>
+      </p:sp>
+      <p:sp>
+        <p:nvSpPr>
+          <p:cNvPr id="8" name="Shape 6"/>
+          <p:cNvSpPr/>
+          <p:nvPr/>
+        </p:nvSpPr>
+        <p:spPr>
+          <a:xfrm>
+            <a:off x="3538728" y="5623560"/>
             <a:ext cx="2651760" cy="566928"/>
           </a:xfrm>
           <a:prstGeom prst="roundRect">
@@ -1357,13 +1396,13 @@
       </p:sp>
       <p:sp>
         <p:nvSpPr>
-          <p:cNvPr id="8" name="Text 6"/>
-          <p:cNvSpPr/>
-          <p:nvPr/>
-        </p:nvSpPr>
-        <p:spPr>
-          <a:xfrm>
-            <a:off x="3538728" y="4206240"/>
+          <p:cNvPr id="9" name="Text 7"/>
+          <p:cNvSpPr/>
+          <p:nvPr/>
+        </p:nvSpPr>
+        <p:spPr>
+          <a:xfrm>
+            <a:off x="3538728" y="5623560"/>
             <a:ext cx="2651760" cy="566928"/>
           </a:xfrm>
           <a:prstGeom prst="rect">
@@ -1380,7 +1419,7 @@
               <a:buNone/>
             </a:pPr>
             <a:r>
-              <a:rPr lang="en-US" sz="1400" b="1" dirty="0">
+              <a:rPr lang="en-US" sz="1350" b="1" dirty="0">
                 <a:solidFill>
                   <a:srgbClr val="E1A93C"/>
                 </a:solidFill>
@@ -1390,19 +1429,19 @@
               </a:rPr>
               <a:t>Door open &gt; 300 s</a:t>
             </a:r>
-            <a:endParaRPr lang="en-US" sz="1400" dirty="0"/>
-          </a:p>
-        </p:txBody>
-      </p:sp>
-      <p:sp>
-        <p:nvSpPr>
-          <p:cNvPr id="9" name="Shape 7"/>
-          <p:cNvSpPr/>
-          <p:nvPr/>
-        </p:nvSpPr>
-        <p:spPr>
-          <a:xfrm>
-            <a:off x="6419088" y="4206240"/>
+            <a:endParaRPr lang="en-US" sz="1350" dirty="0"/>
+          </a:p>
+        </p:txBody>
+      </p:sp>
+      <p:sp>
+        <p:nvSpPr>
+          <p:cNvPr id="10" name="Shape 8"/>
+          <p:cNvSpPr/>
+          <p:nvPr/>
+        </p:nvSpPr>
+        <p:spPr>
+          <a:xfrm>
+            <a:off x="6419088" y="5623560"/>
             <a:ext cx="2651760" cy="566928"/>
           </a:xfrm>
           <a:prstGeom prst="roundRect">
@@ -1423,13 +1462,13 @@
       </p:sp>
       <p:sp>
         <p:nvSpPr>
-          <p:cNvPr id="10" name="Text 8"/>
-          <p:cNvSpPr/>
-          <p:nvPr/>
-        </p:nvSpPr>
-        <p:spPr>
-          <a:xfrm>
-            <a:off x="6419088" y="4206240"/>
+          <p:cNvPr id="11" name="Text 9"/>
+          <p:cNvSpPr/>
+          <p:nvPr/>
+        </p:nvSpPr>
+        <p:spPr>
+          <a:xfrm>
+            <a:off x="6419088" y="5623560"/>
             <a:ext cx="2651760" cy="566928"/>
           </a:xfrm>
           <a:prstGeom prst="rect">
@@ -1446,7 +1485,7 @@
               <a:buNone/>
             </a:pPr>
             <a:r>
-              <a:rPr lang="en-US" sz="1400" b="1" dirty="0">
+              <a:rPr lang="en-US" sz="1350" b="1" dirty="0">
                 <a:solidFill>
                   <a:srgbClr val="E1A93C"/>
                 </a:solidFill>
@@ -1456,20 +1495,20 @@
               </a:rPr>
               <a:t>10 s re-score</a:t>
             </a:r>
-            <a:endParaRPr lang="en-US" sz="1400" dirty="0"/>
-          </a:p>
-        </p:txBody>
-      </p:sp>
-      <p:sp>
-        <p:nvSpPr>
-          <p:cNvPr id="11" name="Text 9"/>
-          <p:cNvSpPr/>
-          <p:nvPr/>
-        </p:nvSpPr>
-        <p:spPr>
-          <a:xfrm>
-            <a:off x="658368" y="6126480"/>
-            <a:ext cx="10972800" cy="365760"/>
+            <a:endParaRPr lang="en-US" sz="1350" dirty="0"/>
+          </a:p>
+        </p:txBody>
+      </p:sp>
+      <p:sp>
+        <p:nvSpPr>
+          <p:cNvPr id="12" name="Text 10"/>
+          <p:cNvSpPr/>
+          <p:nvPr/>
+        </p:nvSpPr>
+        <p:spPr>
+          <a:xfrm>
+            <a:off x="658368" y="6400800"/>
+            <a:ext cx="10972800" cy="320040"/>
           </a:xfrm>
           <a:prstGeom prst="rect">
             <a:avLst/>
@@ -1485,7 +1524,7 @@
               <a:buNone/>
             </a:pPr>
             <a:r>
-              <a:rPr lang="en-US" sz="1300" dirty="0">
+              <a:rPr lang="en-US" sz="1250" dirty="0">
                 <a:solidFill>
                   <a:srgbClr val="5A6E7C"/>
                 </a:solidFill>
@@ -1495,7 +1534,7 @@
               </a:rPr>
               <a:t>Fog &amp; Edge Computing (H9FECC)   ·   deployed live on AWS</a:t>
             </a:r>
-            <a:endParaRPr lang="en-US" sz="1300" dirty="0"/>
+            <a:endParaRPr lang="en-US" sz="1250" dirty="0"/>
           </a:p>
         </p:txBody>
       </p:sp>
@@ -1578,12 +1617,12 @@
         </p:nvSpPr>
         <p:spPr>
           <a:xfrm>
-            <a:off x="640080" y="2468880"/>
-            <a:ext cx="1572768" cy="1371600"/>
+            <a:off x="640080" y="1874520"/>
+            <a:ext cx="2286000" cy="1280160"/>
           </a:xfrm>
           <a:prstGeom prst="roundRect">
             <a:avLst>
-              <a:gd name="adj" fmla="val 6667"/>
+              <a:gd name="adj" fmla="val 7143"/>
             </a:avLst>
           </a:prstGeom>
           <a:solidFill>
@@ -1605,8 +1644,8 @@
         </p:nvSpPr>
         <p:spPr>
           <a:xfrm>
-            <a:off x="1325880" y="2670048"/>
-            <a:ext cx="201168" cy="201168"/>
+            <a:off x="1691640" y="2039112"/>
+            <a:ext cx="182880" cy="182880"/>
           </a:xfrm>
           <a:prstGeom prst="ellipse">
             <a:avLst/>
@@ -1625,8 +1664,8 @@
         </p:nvSpPr>
         <p:spPr>
           <a:xfrm>
-            <a:off x="594360" y="2926080"/>
-            <a:ext cx="1664208" cy="411480"/>
+            <a:off x="612648" y="2258568"/>
+            <a:ext cx="2340864" cy="365760"/>
           </a:xfrm>
           <a:prstGeom prst="rect">
             <a:avLst/>
@@ -1664,8 +1703,8 @@
         </p:nvSpPr>
         <p:spPr>
           <a:xfrm>
-            <a:off x="621792" y="3310128"/>
-            <a:ext cx="1609344" cy="457200"/>
+            <a:off x="640080" y="2606040"/>
+            <a:ext cx="2286000" cy="411480"/>
           </a:xfrm>
           <a:prstGeom prst="rect">
             <a:avLst/>
@@ -1703,8 +1742,733 @@
         </p:nvSpPr>
         <p:spPr>
           <a:xfrm>
-            <a:off x="2231136" y="3154680"/>
-            <a:ext cx="258409" cy="0"/>
+            <a:off x="2944368" y="2514600"/>
+            <a:ext cx="1975104" cy="0"/>
+          </a:xfrm>
+          <a:prstGeom prst="line">
+            <a:avLst/>
+          </a:prstGeom>
+          <a:noFill/>
+          <a:ln w="25400">
+            <a:solidFill>
+              <a:srgbClr val="5A8FB0"/>
+            </a:solidFill>
+            <a:prstDash val="solid"/>
+            <a:headEnd type="none"/>
+            <a:tailEnd type="triangle"/>
+          </a:ln>
+        </p:spPr>
+      </p:sp>
+      <p:sp>
+        <p:nvSpPr>
+          <p:cNvPr id="8" name="Shape 6"/>
+          <p:cNvSpPr/>
+          <p:nvPr/>
+        </p:nvSpPr>
+        <p:spPr>
+          <a:xfrm>
+            <a:off x="4937760" y="1874520"/>
+            <a:ext cx="2286000" cy="1280160"/>
+          </a:xfrm>
+          <a:prstGeom prst="roundRect">
+            <a:avLst>
+              <a:gd name="adj" fmla="val 7143"/>
+            </a:avLst>
+          </a:prstGeom>
+          <a:solidFill>
+            <a:srgbClr val="EEF4F8"/>
+          </a:solidFill>
+          <a:ln w="19050">
+            <a:solidFill>
+              <a:srgbClr val="5A8FB0"/>
+            </a:solidFill>
+            <a:prstDash val="solid"/>
+          </a:ln>
+        </p:spPr>
+      </p:sp>
+      <p:sp>
+        <p:nvSpPr>
+          <p:cNvPr id="9" name="Shape 7"/>
+          <p:cNvSpPr/>
+          <p:nvPr/>
+        </p:nvSpPr>
+        <p:spPr>
+          <a:xfrm>
+            <a:off x="5989320" y="2039112"/>
+            <a:ext cx="182880" cy="182880"/>
+          </a:xfrm>
+          <a:prstGeom prst="ellipse">
+            <a:avLst/>
+          </a:prstGeom>
+          <a:solidFill>
+            <a:srgbClr val="5A8FB0"/>
+          </a:solidFill>
+          <a:ln/>
+        </p:spPr>
+      </p:sp>
+      <p:sp>
+        <p:nvSpPr>
+          <p:cNvPr id="10" name="Text 8"/>
+          <p:cNvSpPr/>
+          <p:nvPr/>
+        </p:nvSpPr>
+        <p:spPr>
+          <a:xfrm>
+            <a:off x="4910328" y="2258568"/>
+            <a:ext cx="2340864" cy="365760"/>
+          </a:xfrm>
+          <a:prstGeom prst="rect">
+            <a:avLst/>
+          </a:prstGeom>
+          <a:noFill/>
+          <a:ln/>
+        </p:spPr>
+        <p:txBody>
+          <a:bodyPr wrap="square" lIns="0" tIns="0" rIns="0" bIns="0" rtlCol="0" anchor="ctr"/>
+          <a:lstStyle/>
+          <a:p>
+            <a:pPr algn="ctr" indent="0" marL="0">
+              <a:buNone/>
+            </a:pPr>
+            <a:r>
+              <a:rPr lang="en-US" sz="1450" b="1" dirty="0">
+                <a:solidFill>
+                  <a:srgbClr val="14293A"/>
+                </a:solidFill>
+                <a:latin typeface="Calibri" pitchFamily="34" charset="0"/>
+                <a:ea typeface="Calibri" pitchFamily="34" charset="-122"/>
+                <a:cs typeface="Calibri" pitchFamily="34" charset="-120"/>
+              </a:rPr>
+              <a:t>Depot relay</a:t>
+            </a:r>
+            <a:endParaRPr lang="en-US" sz="1450" dirty="0"/>
+          </a:p>
+        </p:txBody>
+      </p:sp>
+      <p:sp>
+        <p:nvSpPr>
+          <p:cNvPr id="11" name="Text 9"/>
+          <p:cNvSpPr/>
+          <p:nvPr/>
+        </p:nvSpPr>
+        <p:spPr>
+          <a:xfrm>
+            <a:off x="4937760" y="2606040"/>
+            <a:ext cx="2286000" cy="411480"/>
+          </a:xfrm>
+          <a:prstGeom prst="rect">
+            <a:avLst/>
+          </a:prstGeom>
+          <a:noFill/>
+          <a:ln/>
+        </p:spPr>
+        <p:txBody>
+          <a:bodyPr wrap="square" lIns="0" tIns="0" rIns="0" bIns="0" rtlCol="0" anchor="t"/>
+          <a:lstStyle/>
+          <a:p>
+            <a:pPr algn="ctr" indent="0" marL="0">
+              <a:buNone/>
+            </a:pPr>
+            <a:r>
+              <a:rPr lang="en-US" sz="1050" dirty="0">
+                <a:solidFill>
+                  <a:srgbClr val="5A6E7C"/>
+                </a:solidFill>
+                <a:latin typeface="Calibri" pitchFamily="34" charset="0"/>
+                <a:ea typeface="Calibri" pitchFamily="34" charset="-122"/>
+                <a:cs typeface="Calibri" pitchFamily="34" charset="-120"/>
+              </a:rPr>
+              <a:t>10 s windows · exceptions</a:t>
+            </a:r>
+            <a:endParaRPr lang="en-US" sz="1050" dirty="0"/>
+          </a:p>
+        </p:txBody>
+      </p:sp>
+      <p:sp>
+        <p:nvSpPr>
+          <p:cNvPr id="12" name="Shape 10"/>
+          <p:cNvSpPr/>
+          <p:nvPr/>
+        </p:nvSpPr>
+        <p:spPr>
+          <a:xfrm>
+            <a:off x="7242048" y="2514600"/>
+            <a:ext cx="1975104" cy="0"/>
+          </a:xfrm>
+          <a:prstGeom prst="line">
+            <a:avLst/>
+          </a:prstGeom>
+          <a:noFill/>
+          <a:ln w="25400">
+            <a:solidFill>
+              <a:srgbClr val="5A8FB0"/>
+            </a:solidFill>
+            <a:prstDash val="solid"/>
+            <a:headEnd type="none"/>
+            <a:tailEnd type="triangle"/>
+          </a:ln>
+        </p:spPr>
+      </p:sp>
+      <p:sp>
+        <p:nvSpPr>
+          <p:cNvPr id="13" name="Shape 11"/>
+          <p:cNvSpPr/>
+          <p:nvPr/>
+        </p:nvSpPr>
+        <p:spPr>
+          <a:xfrm>
+            <a:off x="9235440" y="1874520"/>
+            <a:ext cx="2286000" cy="1280160"/>
+          </a:xfrm>
+          <a:prstGeom prst="roundRect">
+            <a:avLst>
+              <a:gd name="adj" fmla="val 7143"/>
+            </a:avLst>
+          </a:prstGeom>
+          <a:solidFill>
+            <a:srgbClr val="EEF4F8"/>
+          </a:solidFill>
+          <a:ln w="19050">
+            <a:solidFill>
+              <a:srgbClr val="1C4A6E"/>
+            </a:solidFill>
+            <a:prstDash val="solid"/>
+          </a:ln>
+        </p:spPr>
+      </p:sp>
+      <p:sp>
+        <p:nvSpPr>
+          <p:cNvPr id="14" name="Shape 12"/>
+          <p:cNvSpPr/>
+          <p:nvPr/>
+        </p:nvSpPr>
+        <p:spPr>
+          <a:xfrm>
+            <a:off x="10287000" y="2039112"/>
+            <a:ext cx="182880" cy="182880"/>
+          </a:xfrm>
+          <a:prstGeom prst="ellipse">
+            <a:avLst/>
+          </a:prstGeom>
+          <a:solidFill>
+            <a:srgbClr val="1C4A6E"/>
+          </a:solidFill>
+          <a:ln/>
+        </p:spPr>
+      </p:sp>
+      <p:sp>
+        <p:nvSpPr>
+          <p:cNvPr id="15" name="Text 13"/>
+          <p:cNvSpPr/>
+          <p:nvPr/>
+        </p:nvSpPr>
+        <p:spPr>
+          <a:xfrm>
+            <a:off x="9208008" y="2258568"/>
+            <a:ext cx="2340864" cy="365760"/>
+          </a:xfrm>
+          <a:prstGeom prst="rect">
+            <a:avLst/>
+          </a:prstGeom>
+          <a:noFill/>
+          <a:ln/>
+        </p:spPr>
+        <p:txBody>
+          <a:bodyPr wrap="square" lIns="0" tIns="0" rIns="0" bIns="0" rtlCol="0" anchor="ctr"/>
+          <a:lstStyle/>
+          <a:p>
+            <a:pPr algn="ctr" indent="0" marL="0">
+              <a:buNone/>
+            </a:pPr>
+            <a:r>
+              <a:rPr lang="en-US" sz="1450" b="1" dirty="0">
+                <a:solidFill>
+                  <a:srgbClr val="14293A"/>
+                </a:solidFill>
+                <a:latin typeface="Calibri" pitchFamily="34" charset="0"/>
+                <a:ea typeface="Calibri" pitchFamily="34" charset="-122"/>
+                <a:cs typeface="Calibri" pitchFamily="34" charset="-120"/>
+              </a:rPr>
+              <a:t>Amazon SQS</a:t>
+            </a:r>
+            <a:endParaRPr lang="en-US" sz="1450" dirty="0"/>
+          </a:p>
+        </p:txBody>
+      </p:sp>
+      <p:sp>
+        <p:nvSpPr>
+          <p:cNvPr id="16" name="Text 14"/>
+          <p:cNvSpPr/>
+          <p:nvPr/>
+        </p:nvSpPr>
+        <p:spPr>
+          <a:xfrm>
+            <a:off x="9235440" y="2606040"/>
+            <a:ext cx="2286000" cy="411480"/>
+          </a:xfrm>
+          <a:prstGeom prst="rect">
+            <a:avLst/>
+          </a:prstGeom>
+          <a:noFill/>
+          <a:ln/>
+        </p:spPr>
+        <p:txBody>
+          <a:bodyPr wrap="square" lIns="0" tIns="0" rIns="0" bIns="0" rtlCol="0" anchor="t"/>
+          <a:lstStyle/>
+          <a:p>
+            <a:pPr algn="ctr" indent="0" marL="0">
+              <a:buNone/>
+            </a:pPr>
+            <a:r>
+              <a:rPr lang="en-US" sz="1050" dirty="0">
+                <a:solidFill>
+                  <a:srgbClr val="5A6E7C"/>
+                </a:solidFill>
+                <a:latin typeface="Calibri" pitchFamily="34" charset="0"/>
+                <a:ea typeface="Calibri" pitchFamily="34" charset="-122"/>
+                <a:cs typeface="Calibri" pitchFamily="34" charset="-120"/>
+              </a:rPr>
+              <a:t>batched ≤10 / call</a:t>
+            </a:r>
+            <a:endParaRPr lang="en-US" sz="1050" dirty="0"/>
+          </a:p>
+        </p:txBody>
+      </p:sp>
+      <p:sp>
+        <p:nvSpPr>
+          <p:cNvPr id="17" name="Shape 15"/>
+          <p:cNvSpPr/>
+          <p:nvPr/>
+        </p:nvSpPr>
+        <p:spPr>
+          <a:xfrm>
+            <a:off x="9235440" y="3520440"/>
+            <a:ext cx="2286000" cy="1280160"/>
+          </a:xfrm>
+          <a:prstGeom prst="roundRect">
+            <a:avLst>
+              <a:gd name="adj" fmla="val 7143"/>
+            </a:avLst>
+          </a:prstGeom>
+          <a:solidFill>
+            <a:srgbClr val="EEF4F8"/>
+          </a:solidFill>
+          <a:ln w="19050">
+            <a:solidFill>
+              <a:srgbClr val="1C4A6E"/>
+            </a:solidFill>
+            <a:prstDash val="solid"/>
+          </a:ln>
+        </p:spPr>
+      </p:sp>
+      <p:sp>
+        <p:nvSpPr>
+          <p:cNvPr id="18" name="Shape 16"/>
+          <p:cNvSpPr/>
+          <p:nvPr/>
+        </p:nvSpPr>
+        <p:spPr>
+          <a:xfrm>
+            <a:off x="10287000" y="3685032"/>
+            <a:ext cx="182880" cy="182880"/>
+          </a:xfrm>
+          <a:prstGeom prst="ellipse">
+            <a:avLst/>
+          </a:prstGeom>
+          <a:solidFill>
+            <a:srgbClr val="1C4A6E"/>
+          </a:solidFill>
+          <a:ln/>
+        </p:spPr>
+      </p:sp>
+      <p:sp>
+        <p:nvSpPr>
+          <p:cNvPr id="19" name="Text 17"/>
+          <p:cNvSpPr/>
+          <p:nvPr/>
+        </p:nvSpPr>
+        <p:spPr>
+          <a:xfrm>
+            <a:off x="9208008" y="3904488"/>
+            <a:ext cx="2340864" cy="365760"/>
+          </a:xfrm>
+          <a:prstGeom prst="rect">
+            <a:avLst/>
+          </a:prstGeom>
+          <a:noFill/>
+          <a:ln/>
+        </p:spPr>
+        <p:txBody>
+          <a:bodyPr wrap="square" lIns="0" tIns="0" rIns="0" bIns="0" rtlCol="0" anchor="ctr"/>
+          <a:lstStyle/>
+          <a:p>
+            <a:pPr algn="ctr" indent="0" marL="0">
+              <a:buNone/>
+            </a:pPr>
+            <a:r>
+              <a:rPr lang="en-US" sz="1450" b="1" dirty="0">
+                <a:solidFill>
+                  <a:srgbClr val="14293A"/>
+                </a:solidFill>
+                <a:latin typeface="Calibri" pitchFamily="34" charset="0"/>
+                <a:ea typeface="Calibri" pitchFamily="34" charset="-122"/>
+                <a:cs typeface="Calibri" pitchFamily="34" charset="-120"/>
+              </a:rPr>
+              <a:t>AWS Lambda</a:t>
+            </a:r>
+            <a:endParaRPr lang="en-US" sz="1450" dirty="0"/>
+          </a:p>
+        </p:txBody>
+      </p:sp>
+      <p:sp>
+        <p:nvSpPr>
+          <p:cNvPr id="20" name="Text 18"/>
+          <p:cNvSpPr/>
+          <p:nvPr/>
+        </p:nvSpPr>
+        <p:spPr>
+          <a:xfrm>
+            <a:off x="9235440" y="4251960"/>
+            <a:ext cx="2286000" cy="411480"/>
+          </a:xfrm>
+          <a:prstGeom prst="rect">
+            <a:avLst/>
+          </a:prstGeom>
+          <a:noFill/>
+          <a:ln/>
+        </p:spPr>
+        <p:txBody>
+          <a:bodyPr wrap="square" lIns="0" tIns="0" rIns="0" bIns="0" rtlCol="0" anchor="t"/>
+          <a:lstStyle/>
+          <a:p>
+            <a:pPr algn="ctr" indent="0" marL="0">
+              <a:buNone/>
+            </a:pPr>
+            <a:r>
+              <a:rPr lang="en-US" sz="1050" dirty="0">
+                <a:solidFill>
+                  <a:srgbClr val="5A6E7C"/>
+                </a:solidFill>
+                <a:latin typeface="Calibri" pitchFamily="34" charset="0"/>
+                <a:ea typeface="Calibri" pitchFamily="34" charset="-122"/>
+                <a:cs typeface="Calibri" pitchFamily="34" charset="-120"/>
+              </a:rPr>
+              <a:t>python3.12 ingest</a:t>
+            </a:r>
+            <a:endParaRPr lang="en-US" sz="1050" dirty="0"/>
+          </a:p>
+        </p:txBody>
+      </p:sp>
+      <p:sp>
+        <p:nvSpPr>
+          <p:cNvPr id="21" name="Shape 19"/>
+          <p:cNvSpPr/>
+          <p:nvPr/>
+        </p:nvSpPr>
+        <p:spPr>
+          <a:xfrm>
+            <a:off x="7242048" y="4160520"/>
+            <a:ext cx="1975104" cy="0"/>
+          </a:xfrm>
+          <a:prstGeom prst="line">
+            <a:avLst/>
+          </a:prstGeom>
+          <a:noFill/>
+          <a:ln w="25400">
+            <a:solidFill>
+              <a:srgbClr val="5A8FB0"/>
+            </a:solidFill>
+            <a:prstDash val="solid"/>
+            <a:headEnd type="triangle"/>
+            <a:tailEnd type="oval"/>
+          </a:ln>
+        </p:spPr>
+      </p:sp>
+      <p:sp>
+        <p:nvSpPr>
+          <p:cNvPr id="22" name="Shape 20"/>
+          <p:cNvSpPr/>
+          <p:nvPr/>
+        </p:nvSpPr>
+        <p:spPr>
+          <a:xfrm>
+            <a:off x="4937760" y="3520440"/>
+            <a:ext cx="2286000" cy="1280160"/>
+          </a:xfrm>
+          <a:prstGeom prst="roundRect">
+            <a:avLst>
+              <a:gd name="adj" fmla="val 7143"/>
+            </a:avLst>
+          </a:prstGeom>
+          <a:solidFill>
+            <a:srgbClr val="EEF4F8"/>
+          </a:solidFill>
+          <a:ln w="19050">
+            <a:solidFill>
+              <a:srgbClr val="1C4A6E"/>
+            </a:solidFill>
+            <a:prstDash val="solid"/>
+          </a:ln>
+        </p:spPr>
+      </p:sp>
+      <p:sp>
+        <p:nvSpPr>
+          <p:cNvPr id="23" name="Shape 21"/>
+          <p:cNvSpPr/>
+          <p:nvPr/>
+        </p:nvSpPr>
+        <p:spPr>
+          <a:xfrm>
+            <a:off x="5989320" y="3685032"/>
+            <a:ext cx="182880" cy="182880"/>
+          </a:xfrm>
+          <a:prstGeom prst="ellipse">
+            <a:avLst/>
+          </a:prstGeom>
+          <a:solidFill>
+            <a:srgbClr val="1C4A6E"/>
+          </a:solidFill>
+          <a:ln/>
+        </p:spPr>
+      </p:sp>
+      <p:sp>
+        <p:nvSpPr>
+          <p:cNvPr id="24" name="Text 22"/>
+          <p:cNvSpPr/>
+          <p:nvPr/>
+        </p:nvSpPr>
+        <p:spPr>
+          <a:xfrm>
+            <a:off x="4910328" y="3904488"/>
+            <a:ext cx="2340864" cy="365760"/>
+          </a:xfrm>
+          <a:prstGeom prst="rect">
+            <a:avLst/>
+          </a:prstGeom>
+          <a:noFill/>
+          <a:ln/>
+        </p:spPr>
+        <p:txBody>
+          <a:bodyPr wrap="square" lIns="0" tIns="0" rIns="0" bIns="0" rtlCol="0" anchor="ctr"/>
+          <a:lstStyle/>
+          <a:p>
+            <a:pPr algn="ctr" indent="0" marL="0">
+              <a:buNone/>
+            </a:pPr>
+            <a:r>
+              <a:rPr lang="en-US" sz="1450" b="1" dirty="0">
+                <a:solidFill>
+                  <a:srgbClr val="14293A"/>
+                </a:solidFill>
+                <a:latin typeface="Calibri" pitchFamily="34" charset="0"/>
+                <a:ea typeface="Calibri" pitchFamily="34" charset="-122"/>
+                <a:cs typeface="Calibri" pitchFamily="34" charset="-120"/>
+              </a:rPr>
+              <a:t>DynamoDB</a:t>
+            </a:r>
+            <a:endParaRPr lang="en-US" sz="1450" dirty="0"/>
+          </a:p>
+        </p:txBody>
+      </p:sp>
+      <p:sp>
+        <p:nvSpPr>
+          <p:cNvPr id="25" name="Text 23"/>
+          <p:cNvSpPr/>
+          <p:nvPr/>
+        </p:nvSpPr>
+        <p:spPr>
+          <a:xfrm>
+            <a:off x="4937760" y="4251960"/>
+            <a:ext cx="2286000" cy="411480"/>
+          </a:xfrm>
+          <a:prstGeom prst="rect">
+            <a:avLst/>
+          </a:prstGeom>
+          <a:noFill/>
+          <a:ln/>
+        </p:spPr>
+        <p:txBody>
+          <a:bodyPr wrap="square" lIns="0" tIns="0" rIns="0" bIns="0" rtlCol="0" anchor="t"/>
+          <a:lstStyle/>
+          <a:p>
+            <a:pPr algn="ctr" indent="0" marL="0">
+              <a:buNone/>
+            </a:pPr>
+            <a:r>
+              <a:rPr lang="en-US" sz="1050" dirty="0">
+                <a:solidFill>
+                  <a:srgbClr val="5A6E7C"/>
+                </a:solidFill>
+                <a:latin typeface="Calibri" pitchFamily="34" charset="0"/>
+                <a:ea typeface="Calibri" pitchFamily="34" charset="-122"/>
+                <a:cs typeface="Calibri" pitchFamily="34" charset="-120"/>
+              </a:rPr>
+              <a:t>window archive</a:t>
+            </a:r>
+            <a:endParaRPr lang="en-US" sz="1050" dirty="0"/>
+          </a:p>
+        </p:txBody>
+      </p:sp>
+      <p:sp>
+        <p:nvSpPr>
+          <p:cNvPr id="26" name="Shape 24"/>
+          <p:cNvSpPr/>
+          <p:nvPr/>
+        </p:nvSpPr>
+        <p:spPr>
+          <a:xfrm>
+            <a:off x="2944368" y="4160520"/>
+            <a:ext cx="1975104" cy="0"/>
+          </a:xfrm>
+          <a:prstGeom prst="line">
+            <a:avLst/>
+          </a:prstGeom>
+          <a:noFill/>
+          <a:ln w="25400">
+            <a:solidFill>
+              <a:srgbClr val="5A8FB0"/>
+            </a:solidFill>
+            <a:prstDash val="solid"/>
+            <a:headEnd type="triangle"/>
+            <a:tailEnd type="oval"/>
+          </a:ln>
+        </p:spPr>
+      </p:sp>
+      <p:sp>
+        <p:nvSpPr>
+          <p:cNvPr id="27" name="Shape 25"/>
+          <p:cNvSpPr/>
+          <p:nvPr/>
+        </p:nvSpPr>
+        <p:spPr>
+          <a:xfrm>
+            <a:off x="640080" y="3520440"/>
+            <a:ext cx="2286000" cy="1280160"/>
+          </a:xfrm>
+          <a:prstGeom prst="roundRect">
+            <a:avLst>
+              <a:gd name="adj" fmla="val 7143"/>
+            </a:avLst>
+          </a:prstGeom>
+          <a:solidFill>
+            <a:srgbClr val="EEF4F8"/>
+          </a:solidFill>
+          <a:ln w="19050">
+            <a:solidFill>
+              <a:srgbClr val="2E6C93"/>
+            </a:solidFill>
+            <a:prstDash val="solid"/>
+          </a:ln>
+        </p:spPr>
+      </p:sp>
+      <p:sp>
+        <p:nvSpPr>
+          <p:cNvPr id="28" name="Shape 26"/>
+          <p:cNvSpPr/>
+          <p:nvPr/>
+        </p:nvSpPr>
+        <p:spPr>
+          <a:xfrm>
+            <a:off x="1691640" y="3685032"/>
+            <a:ext cx="182880" cy="182880"/>
+          </a:xfrm>
+          <a:prstGeom prst="ellipse">
+            <a:avLst/>
+          </a:prstGeom>
+          <a:solidFill>
+            <a:srgbClr val="2E6C93"/>
+          </a:solidFill>
+          <a:ln/>
+        </p:spPr>
+      </p:sp>
+      <p:sp>
+        <p:nvSpPr>
+          <p:cNvPr id="29" name="Text 27"/>
+          <p:cNvSpPr/>
+          <p:nvPr/>
+        </p:nvSpPr>
+        <p:spPr>
+          <a:xfrm>
+            <a:off x="612648" y="3904488"/>
+            <a:ext cx="2340864" cy="365760"/>
+          </a:xfrm>
+          <a:prstGeom prst="rect">
+            <a:avLst/>
+          </a:prstGeom>
+          <a:noFill/>
+          <a:ln/>
+        </p:spPr>
+        <p:txBody>
+          <a:bodyPr wrap="square" lIns="0" tIns="0" rIns="0" bIns="0" rtlCol="0" anchor="ctr"/>
+          <a:lstStyle/>
+          <a:p>
+            <a:pPr algn="ctr" indent="0" marL="0">
+              <a:buNone/>
+            </a:pPr>
+            <a:r>
+              <a:rPr lang="en-US" sz="1450" b="1" dirty="0">
+                <a:solidFill>
+                  <a:srgbClr val="14293A"/>
+                </a:solidFill>
+                <a:latin typeface="Calibri" pitchFamily="34" charset="0"/>
+                <a:ea typeface="Calibri" pitchFamily="34" charset="-122"/>
+                <a:cs typeface="Calibri" pitchFamily="34" charset="-120"/>
+              </a:rPr>
+              <a:t>API GW + S3</a:t>
+            </a:r>
+            <a:endParaRPr lang="en-US" sz="1450" dirty="0"/>
+          </a:p>
+        </p:txBody>
+      </p:sp>
+      <p:sp>
+        <p:nvSpPr>
+          <p:cNvPr id="30" name="Text 28"/>
+          <p:cNvSpPr/>
+          <p:nvPr/>
+        </p:nvSpPr>
+        <p:spPr>
+          <a:xfrm>
+            <a:off x="640080" y="4251960"/>
+            <a:ext cx="2286000" cy="411480"/>
+          </a:xfrm>
+          <a:prstGeom prst="rect">
+            <a:avLst/>
+          </a:prstGeom>
+          <a:noFill/>
+          <a:ln/>
+        </p:spPr>
+        <p:txBody>
+          <a:bodyPr wrap="square" lIns="0" tIns="0" rIns="0" bIns="0" rtlCol="0" anchor="t"/>
+          <a:lstStyle/>
+          <a:p>
+            <a:pPr algn="ctr" indent="0" marL="0">
+              <a:buNone/>
+            </a:pPr>
+            <a:r>
+              <a:rPr lang="en-US" sz="1050" dirty="0">
+                <a:solidFill>
+                  <a:srgbClr val="5A6E7C"/>
+                </a:solidFill>
+                <a:latin typeface="Calibri" pitchFamily="34" charset="0"/>
+                <a:ea typeface="Calibri" pitchFamily="34" charset="-122"/>
+                <a:cs typeface="Calibri" pitchFamily="34" charset="-120"/>
+              </a:rPr>
+              <a:t>live manifest</a:t>
+            </a:r>
+            <a:endParaRPr lang="en-US" sz="1050" dirty="0"/>
+          </a:p>
+        </p:txBody>
+      </p:sp>
+      <p:sp>
+        <p:nvSpPr>
+          <p:cNvPr id="31" name="Shape 29"/>
+          <p:cNvSpPr/>
+          <p:nvPr/>
+        </p:nvSpPr>
+        <p:spPr>
+          <a:xfrm>
+            <a:off x="10378440" y="3154680"/>
+            <a:ext cx="0" cy="365760"/>
           </a:xfrm>
           <a:prstGeom prst="line">
             <a:avLst/>
@@ -1721,813 +2485,14 @@
       </p:sp>
       <p:sp>
         <p:nvSpPr>
-          <p:cNvPr id="8" name="Shape 6"/>
-          <p:cNvSpPr/>
-          <p:nvPr/>
-        </p:nvSpPr>
-        <p:spPr>
-          <a:xfrm>
-            <a:off x="2507833" y="2468880"/>
-            <a:ext cx="1572768" cy="1371600"/>
-          </a:xfrm>
-          <a:prstGeom prst="roundRect">
-            <a:avLst>
-              <a:gd name="adj" fmla="val 6667"/>
-            </a:avLst>
-          </a:prstGeom>
-          <a:solidFill>
-            <a:srgbClr val="EEF4F8"/>
-          </a:solidFill>
-          <a:ln w="19050">
-            <a:solidFill>
-              <a:srgbClr val="5A8FB0"/>
-            </a:solidFill>
-            <a:prstDash val="solid"/>
-          </a:ln>
-        </p:spPr>
-      </p:sp>
-      <p:sp>
-        <p:nvSpPr>
-          <p:cNvPr id="9" name="Shape 7"/>
-          <p:cNvSpPr/>
-          <p:nvPr/>
-        </p:nvSpPr>
-        <p:spPr>
-          <a:xfrm>
-            <a:off x="3193633" y="2670048"/>
-            <a:ext cx="201168" cy="201168"/>
-          </a:xfrm>
-          <a:prstGeom prst="ellipse">
-            <a:avLst/>
-          </a:prstGeom>
-          <a:solidFill>
-            <a:srgbClr val="5A8FB0"/>
-          </a:solidFill>
-          <a:ln/>
-        </p:spPr>
-      </p:sp>
-      <p:sp>
-        <p:nvSpPr>
-          <p:cNvPr id="10" name="Text 8"/>
-          <p:cNvSpPr/>
-          <p:nvPr/>
-        </p:nvSpPr>
-        <p:spPr>
-          <a:xfrm>
-            <a:off x="2462113" y="2926080"/>
-            <a:ext cx="1664208" cy="411480"/>
-          </a:xfrm>
-          <a:prstGeom prst="rect">
-            <a:avLst/>
-          </a:prstGeom>
-          <a:noFill/>
-          <a:ln/>
-        </p:spPr>
-        <p:txBody>
-          <a:bodyPr wrap="square" lIns="0" tIns="0" rIns="0" bIns="0" rtlCol="0" anchor="ctr"/>
-          <a:lstStyle/>
-          <a:p>
-            <a:pPr algn="ctr" indent="0" marL="0">
-              <a:buNone/>
-            </a:pPr>
-            <a:r>
-              <a:rPr lang="en-US" sz="1450" b="1" dirty="0">
-                <a:solidFill>
-                  <a:srgbClr val="14293A"/>
-                </a:solidFill>
-                <a:latin typeface="Calibri" pitchFamily="34" charset="0"/>
-                <a:ea typeface="Calibri" pitchFamily="34" charset="-122"/>
-                <a:cs typeface="Calibri" pitchFamily="34" charset="-120"/>
-              </a:rPr>
-              <a:t>Depot relay</a:t>
-            </a:r>
-            <a:endParaRPr lang="en-US" sz="1450" dirty="0"/>
-          </a:p>
-        </p:txBody>
-      </p:sp>
-      <p:sp>
-        <p:nvSpPr>
-          <p:cNvPr id="11" name="Text 9"/>
-          <p:cNvSpPr/>
-          <p:nvPr/>
-        </p:nvSpPr>
-        <p:spPr>
-          <a:xfrm>
-            <a:off x="2489545" y="3310128"/>
-            <a:ext cx="1609344" cy="457200"/>
-          </a:xfrm>
-          <a:prstGeom prst="rect">
-            <a:avLst/>
-          </a:prstGeom>
-          <a:noFill/>
-          <a:ln/>
-        </p:spPr>
-        <p:txBody>
-          <a:bodyPr wrap="square" lIns="0" tIns="0" rIns="0" bIns="0" rtlCol="0" anchor="t"/>
-          <a:lstStyle/>
-          <a:p>
-            <a:pPr algn="ctr" indent="0" marL="0">
-              <a:buNone/>
-            </a:pPr>
-            <a:r>
-              <a:rPr lang="en-US" sz="1050" dirty="0">
-                <a:solidFill>
-                  <a:srgbClr val="5A6E7C"/>
-                </a:solidFill>
-                <a:latin typeface="Calibri" pitchFamily="34" charset="0"/>
-                <a:ea typeface="Calibri" pitchFamily="34" charset="-122"/>
-                <a:cs typeface="Calibri" pitchFamily="34" charset="-120"/>
-              </a:rPr>
-              <a:t>10 s windows · exceptions</a:t>
-            </a:r>
-            <a:endParaRPr lang="en-US" sz="1050" dirty="0"/>
-          </a:p>
-        </p:txBody>
-      </p:sp>
-      <p:sp>
-        <p:nvSpPr>
-          <p:cNvPr id="12" name="Shape 10"/>
-          <p:cNvSpPr/>
-          <p:nvPr/>
-        </p:nvSpPr>
-        <p:spPr>
-          <a:xfrm>
-            <a:off x="4098889" y="3154680"/>
-            <a:ext cx="258409" cy="0"/>
-          </a:xfrm>
-          <a:prstGeom prst="line">
-            <a:avLst/>
-          </a:prstGeom>
-          <a:noFill/>
-          <a:ln w="25400">
-            <a:solidFill>
-              <a:srgbClr val="5A8FB0"/>
-            </a:solidFill>
-            <a:prstDash val="solid"/>
-            <a:tailEnd type="triangle"/>
-          </a:ln>
-        </p:spPr>
-      </p:sp>
-      <p:sp>
-        <p:nvSpPr>
-          <p:cNvPr id="13" name="Shape 11"/>
-          <p:cNvSpPr/>
-          <p:nvPr/>
-        </p:nvSpPr>
-        <p:spPr>
-          <a:xfrm>
-            <a:off x="4375587" y="2468880"/>
-            <a:ext cx="1572768" cy="1371600"/>
-          </a:xfrm>
-          <a:prstGeom prst="roundRect">
-            <a:avLst>
-              <a:gd name="adj" fmla="val 6667"/>
-            </a:avLst>
-          </a:prstGeom>
-          <a:solidFill>
-            <a:srgbClr val="EEF4F8"/>
-          </a:solidFill>
-          <a:ln w="19050">
-            <a:solidFill>
-              <a:srgbClr val="1C4A6E"/>
-            </a:solidFill>
-            <a:prstDash val="solid"/>
-          </a:ln>
-        </p:spPr>
-      </p:sp>
-      <p:sp>
-        <p:nvSpPr>
-          <p:cNvPr id="14" name="Shape 12"/>
-          <p:cNvSpPr/>
-          <p:nvPr/>
-        </p:nvSpPr>
-        <p:spPr>
-          <a:xfrm>
-            <a:off x="5061387" y="2670048"/>
-            <a:ext cx="201168" cy="201168"/>
-          </a:xfrm>
-          <a:prstGeom prst="ellipse">
-            <a:avLst/>
-          </a:prstGeom>
-          <a:solidFill>
-            <a:srgbClr val="1C4A6E"/>
-          </a:solidFill>
-          <a:ln/>
-        </p:spPr>
-      </p:sp>
-      <p:sp>
-        <p:nvSpPr>
-          <p:cNvPr id="15" name="Text 13"/>
-          <p:cNvSpPr/>
-          <p:nvPr/>
-        </p:nvSpPr>
-        <p:spPr>
-          <a:xfrm>
-            <a:off x="4329867" y="2926080"/>
-            <a:ext cx="1664208" cy="411480"/>
-          </a:xfrm>
-          <a:prstGeom prst="rect">
-            <a:avLst/>
-          </a:prstGeom>
-          <a:noFill/>
-          <a:ln/>
-        </p:spPr>
-        <p:txBody>
-          <a:bodyPr wrap="square" lIns="0" tIns="0" rIns="0" bIns="0" rtlCol="0" anchor="ctr"/>
-          <a:lstStyle/>
-          <a:p>
-            <a:pPr algn="ctr" indent="0" marL="0">
-              <a:buNone/>
-            </a:pPr>
-            <a:r>
-              <a:rPr lang="en-US" sz="1450" b="1" dirty="0">
-                <a:solidFill>
-                  <a:srgbClr val="14293A"/>
-                </a:solidFill>
-                <a:latin typeface="Calibri" pitchFamily="34" charset="0"/>
-                <a:ea typeface="Calibri" pitchFamily="34" charset="-122"/>
-                <a:cs typeface="Calibri" pitchFamily="34" charset="-120"/>
-              </a:rPr>
-              <a:t>Amazon SQS</a:t>
-            </a:r>
-            <a:endParaRPr lang="en-US" sz="1450" dirty="0"/>
-          </a:p>
-        </p:txBody>
-      </p:sp>
-      <p:sp>
-        <p:nvSpPr>
-          <p:cNvPr id="16" name="Text 14"/>
-          <p:cNvSpPr/>
-          <p:nvPr/>
-        </p:nvSpPr>
-        <p:spPr>
-          <a:xfrm>
-            <a:off x="4357299" y="3310128"/>
-            <a:ext cx="1609344" cy="457200"/>
-          </a:xfrm>
-          <a:prstGeom prst="rect">
-            <a:avLst/>
-          </a:prstGeom>
-          <a:noFill/>
-          <a:ln/>
-        </p:spPr>
-        <p:txBody>
-          <a:bodyPr wrap="square" lIns="0" tIns="0" rIns="0" bIns="0" rtlCol="0" anchor="t"/>
-          <a:lstStyle/>
-          <a:p>
-            <a:pPr algn="ctr" indent="0" marL="0">
-              <a:buNone/>
-            </a:pPr>
-            <a:r>
-              <a:rPr lang="en-US" sz="1050" dirty="0">
-                <a:solidFill>
-                  <a:srgbClr val="5A6E7C"/>
-                </a:solidFill>
-                <a:latin typeface="Calibri" pitchFamily="34" charset="0"/>
-                <a:ea typeface="Calibri" pitchFamily="34" charset="-122"/>
-                <a:cs typeface="Calibri" pitchFamily="34" charset="-120"/>
-              </a:rPr>
-              <a:t>batched ≤10 / call</a:t>
-            </a:r>
-            <a:endParaRPr lang="en-US" sz="1050" dirty="0"/>
-          </a:p>
-        </p:txBody>
-      </p:sp>
-      <p:sp>
-        <p:nvSpPr>
-          <p:cNvPr id="17" name="Shape 15"/>
-          <p:cNvSpPr/>
-          <p:nvPr/>
-        </p:nvSpPr>
-        <p:spPr>
-          <a:xfrm>
-            <a:off x="5966643" y="3154680"/>
-            <a:ext cx="258409" cy="0"/>
-          </a:xfrm>
-          <a:prstGeom prst="line">
-            <a:avLst/>
-          </a:prstGeom>
-          <a:noFill/>
-          <a:ln w="25400">
-            <a:solidFill>
-              <a:srgbClr val="5A8FB0"/>
-            </a:solidFill>
-            <a:prstDash val="solid"/>
-            <a:tailEnd type="triangle"/>
-          </a:ln>
-        </p:spPr>
-      </p:sp>
-      <p:sp>
-        <p:nvSpPr>
-          <p:cNvPr id="18" name="Shape 16"/>
-          <p:cNvSpPr/>
-          <p:nvPr/>
-        </p:nvSpPr>
-        <p:spPr>
-          <a:xfrm>
-            <a:off x="6243340" y="2468880"/>
-            <a:ext cx="1572768" cy="1371600"/>
-          </a:xfrm>
-          <a:prstGeom prst="roundRect">
-            <a:avLst>
-              <a:gd name="adj" fmla="val 6667"/>
-            </a:avLst>
-          </a:prstGeom>
-          <a:solidFill>
-            <a:srgbClr val="EEF4F8"/>
-          </a:solidFill>
-          <a:ln w="19050">
-            <a:solidFill>
-              <a:srgbClr val="1C4A6E"/>
-            </a:solidFill>
-            <a:prstDash val="solid"/>
-          </a:ln>
-        </p:spPr>
-      </p:sp>
-      <p:sp>
-        <p:nvSpPr>
-          <p:cNvPr id="19" name="Shape 17"/>
-          <p:cNvSpPr/>
-          <p:nvPr/>
-        </p:nvSpPr>
-        <p:spPr>
-          <a:xfrm>
-            <a:off x="6929140" y="2670048"/>
-            <a:ext cx="201168" cy="201168"/>
-          </a:xfrm>
-          <a:prstGeom prst="ellipse">
-            <a:avLst/>
-          </a:prstGeom>
-          <a:solidFill>
-            <a:srgbClr val="1C4A6E"/>
-          </a:solidFill>
-          <a:ln/>
-        </p:spPr>
-      </p:sp>
-      <p:sp>
-        <p:nvSpPr>
-          <p:cNvPr id="20" name="Text 18"/>
-          <p:cNvSpPr/>
-          <p:nvPr/>
-        </p:nvSpPr>
-        <p:spPr>
-          <a:xfrm>
-            <a:off x="6197620" y="2926080"/>
-            <a:ext cx="1664208" cy="411480"/>
-          </a:xfrm>
-          <a:prstGeom prst="rect">
-            <a:avLst/>
-          </a:prstGeom>
-          <a:noFill/>
-          <a:ln/>
-        </p:spPr>
-        <p:txBody>
-          <a:bodyPr wrap="square" lIns="0" tIns="0" rIns="0" bIns="0" rtlCol="0" anchor="ctr"/>
-          <a:lstStyle/>
-          <a:p>
-            <a:pPr algn="ctr" indent="0" marL="0">
-              <a:buNone/>
-            </a:pPr>
-            <a:r>
-              <a:rPr lang="en-US" sz="1450" b="1" dirty="0">
-                <a:solidFill>
-                  <a:srgbClr val="14293A"/>
-                </a:solidFill>
-                <a:latin typeface="Calibri" pitchFamily="34" charset="0"/>
-                <a:ea typeface="Calibri" pitchFamily="34" charset="-122"/>
-                <a:cs typeface="Calibri" pitchFamily="34" charset="-120"/>
-              </a:rPr>
-              <a:t>AWS Lambda</a:t>
-            </a:r>
-            <a:endParaRPr lang="en-US" sz="1450" dirty="0"/>
-          </a:p>
-        </p:txBody>
-      </p:sp>
-      <p:sp>
-        <p:nvSpPr>
-          <p:cNvPr id="21" name="Text 19"/>
-          <p:cNvSpPr/>
-          <p:nvPr/>
-        </p:nvSpPr>
-        <p:spPr>
-          <a:xfrm>
-            <a:off x="6225052" y="3310128"/>
-            <a:ext cx="1609344" cy="457200"/>
-          </a:xfrm>
-          <a:prstGeom prst="rect">
-            <a:avLst/>
-          </a:prstGeom>
-          <a:noFill/>
-          <a:ln/>
-        </p:spPr>
-        <p:txBody>
-          <a:bodyPr wrap="square" lIns="0" tIns="0" rIns="0" bIns="0" rtlCol="0" anchor="t"/>
-          <a:lstStyle/>
-          <a:p>
-            <a:pPr algn="ctr" indent="0" marL="0">
-              <a:buNone/>
-            </a:pPr>
-            <a:r>
-              <a:rPr lang="en-US" sz="1050" dirty="0">
-                <a:solidFill>
-                  <a:srgbClr val="5A6E7C"/>
-                </a:solidFill>
-                <a:latin typeface="Calibri" pitchFamily="34" charset="0"/>
-                <a:ea typeface="Calibri" pitchFamily="34" charset="-122"/>
-                <a:cs typeface="Calibri" pitchFamily="34" charset="-120"/>
-              </a:rPr>
-              <a:t>python3.12 ingest</a:t>
-            </a:r>
-            <a:endParaRPr lang="en-US" sz="1050" dirty="0"/>
-          </a:p>
-        </p:txBody>
-      </p:sp>
-      <p:sp>
-        <p:nvSpPr>
-          <p:cNvPr id="22" name="Shape 20"/>
-          <p:cNvSpPr/>
-          <p:nvPr/>
-        </p:nvSpPr>
-        <p:spPr>
-          <a:xfrm>
-            <a:off x="7834396" y="3154680"/>
-            <a:ext cx="258409" cy="0"/>
-          </a:xfrm>
-          <a:prstGeom prst="line">
-            <a:avLst/>
-          </a:prstGeom>
-          <a:noFill/>
-          <a:ln w="25400">
-            <a:solidFill>
-              <a:srgbClr val="5A8FB0"/>
-            </a:solidFill>
-            <a:prstDash val="solid"/>
-            <a:tailEnd type="triangle"/>
-          </a:ln>
-        </p:spPr>
-      </p:sp>
-      <p:sp>
-        <p:nvSpPr>
-          <p:cNvPr id="23" name="Shape 21"/>
-          <p:cNvSpPr/>
-          <p:nvPr/>
-        </p:nvSpPr>
-        <p:spPr>
-          <a:xfrm>
-            <a:off x="8111094" y="2468880"/>
-            <a:ext cx="1572768" cy="1371600"/>
-          </a:xfrm>
-          <a:prstGeom prst="roundRect">
-            <a:avLst>
-              <a:gd name="adj" fmla="val 6667"/>
-            </a:avLst>
-          </a:prstGeom>
-          <a:solidFill>
-            <a:srgbClr val="EEF4F8"/>
-          </a:solidFill>
-          <a:ln w="19050">
-            <a:solidFill>
-              <a:srgbClr val="1C4A6E"/>
-            </a:solidFill>
-            <a:prstDash val="solid"/>
-          </a:ln>
-        </p:spPr>
-      </p:sp>
-      <p:sp>
-        <p:nvSpPr>
-          <p:cNvPr id="24" name="Shape 22"/>
-          <p:cNvSpPr/>
-          <p:nvPr/>
-        </p:nvSpPr>
-        <p:spPr>
-          <a:xfrm>
-            <a:off x="8796894" y="2670048"/>
-            <a:ext cx="201168" cy="201168"/>
-          </a:xfrm>
-          <a:prstGeom prst="ellipse">
-            <a:avLst/>
-          </a:prstGeom>
-          <a:solidFill>
-            <a:srgbClr val="1C4A6E"/>
-          </a:solidFill>
-          <a:ln/>
-        </p:spPr>
-      </p:sp>
-      <p:sp>
-        <p:nvSpPr>
-          <p:cNvPr id="25" name="Text 23"/>
-          <p:cNvSpPr/>
-          <p:nvPr/>
-        </p:nvSpPr>
-        <p:spPr>
-          <a:xfrm>
-            <a:off x="8065374" y="2926080"/>
-            <a:ext cx="1664208" cy="411480"/>
-          </a:xfrm>
-          <a:prstGeom prst="rect">
-            <a:avLst/>
-          </a:prstGeom>
-          <a:noFill/>
-          <a:ln/>
-        </p:spPr>
-        <p:txBody>
-          <a:bodyPr wrap="square" lIns="0" tIns="0" rIns="0" bIns="0" rtlCol="0" anchor="ctr"/>
-          <a:lstStyle/>
-          <a:p>
-            <a:pPr algn="ctr" indent="0" marL="0">
-              <a:buNone/>
-            </a:pPr>
-            <a:r>
-              <a:rPr lang="en-US" sz="1450" b="1" dirty="0">
-                <a:solidFill>
-                  <a:srgbClr val="14293A"/>
-                </a:solidFill>
-                <a:latin typeface="Calibri" pitchFamily="34" charset="0"/>
-                <a:ea typeface="Calibri" pitchFamily="34" charset="-122"/>
-                <a:cs typeface="Calibri" pitchFamily="34" charset="-120"/>
-              </a:rPr>
-              <a:t>DynamoDB</a:t>
-            </a:r>
-            <a:endParaRPr lang="en-US" sz="1450" dirty="0"/>
-          </a:p>
-        </p:txBody>
-      </p:sp>
-      <p:sp>
-        <p:nvSpPr>
-          <p:cNvPr id="26" name="Text 24"/>
-          <p:cNvSpPr/>
-          <p:nvPr/>
-        </p:nvSpPr>
-        <p:spPr>
-          <a:xfrm>
-            <a:off x="8092806" y="3310128"/>
-            <a:ext cx="1609344" cy="457200"/>
-          </a:xfrm>
-          <a:prstGeom prst="rect">
-            <a:avLst/>
-          </a:prstGeom>
-          <a:noFill/>
-          <a:ln/>
-        </p:spPr>
-        <p:txBody>
-          <a:bodyPr wrap="square" lIns="0" tIns="0" rIns="0" bIns="0" rtlCol="0" anchor="t"/>
-          <a:lstStyle/>
-          <a:p>
-            <a:pPr algn="ctr" indent="0" marL="0">
-              <a:buNone/>
-            </a:pPr>
-            <a:r>
-              <a:rPr lang="en-US" sz="1050" dirty="0">
-                <a:solidFill>
-                  <a:srgbClr val="5A6E7C"/>
-                </a:solidFill>
-                <a:latin typeface="Calibri" pitchFamily="34" charset="0"/>
-                <a:ea typeface="Calibri" pitchFamily="34" charset="-122"/>
-                <a:cs typeface="Calibri" pitchFamily="34" charset="-120"/>
-              </a:rPr>
-              <a:t>window archive</a:t>
-            </a:r>
-            <a:endParaRPr lang="en-US" sz="1050" dirty="0"/>
-          </a:p>
-        </p:txBody>
-      </p:sp>
-      <p:sp>
-        <p:nvSpPr>
-          <p:cNvPr id="27" name="Shape 25"/>
-          <p:cNvSpPr/>
-          <p:nvPr/>
-        </p:nvSpPr>
-        <p:spPr>
-          <a:xfrm>
-            <a:off x="9702150" y="3154680"/>
-            <a:ext cx="258409" cy="0"/>
-          </a:xfrm>
-          <a:prstGeom prst="line">
-            <a:avLst/>
-          </a:prstGeom>
-          <a:noFill/>
-          <a:ln w="25400">
-            <a:solidFill>
-              <a:srgbClr val="5A8FB0"/>
-            </a:solidFill>
-            <a:prstDash val="solid"/>
-            <a:tailEnd type="triangle"/>
-          </a:ln>
-        </p:spPr>
-      </p:sp>
-      <p:sp>
-        <p:nvSpPr>
-          <p:cNvPr id="28" name="Shape 26"/>
-          <p:cNvSpPr/>
-          <p:nvPr/>
-        </p:nvSpPr>
-        <p:spPr>
-          <a:xfrm>
-            <a:off x="9978847" y="2468880"/>
-            <a:ext cx="1572768" cy="1371600"/>
-          </a:xfrm>
-          <a:prstGeom prst="roundRect">
-            <a:avLst>
-              <a:gd name="adj" fmla="val 6667"/>
-            </a:avLst>
-          </a:prstGeom>
-          <a:solidFill>
-            <a:srgbClr val="EEF4F8"/>
-          </a:solidFill>
-          <a:ln w="19050">
-            <a:solidFill>
-              <a:srgbClr val="2E6C93"/>
-            </a:solidFill>
-            <a:prstDash val="solid"/>
-          </a:ln>
-        </p:spPr>
-      </p:sp>
-      <p:sp>
-        <p:nvSpPr>
-          <p:cNvPr id="29" name="Shape 27"/>
-          <p:cNvSpPr/>
-          <p:nvPr/>
-        </p:nvSpPr>
-        <p:spPr>
-          <a:xfrm>
-            <a:off x="10664647" y="2670048"/>
-            <a:ext cx="201168" cy="201168"/>
-          </a:xfrm>
-          <a:prstGeom prst="ellipse">
-            <a:avLst/>
-          </a:prstGeom>
-          <a:solidFill>
-            <a:srgbClr val="2E6C93"/>
-          </a:solidFill>
-          <a:ln/>
-        </p:spPr>
-      </p:sp>
-      <p:sp>
-        <p:nvSpPr>
-          <p:cNvPr id="30" name="Text 28"/>
-          <p:cNvSpPr/>
-          <p:nvPr/>
-        </p:nvSpPr>
-        <p:spPr>
-          <a:xfrm>
-            <a:off x="9933127" y="2926080"/>
-            <a:ext cx="1664208" cy="411480"/>
-          </a:xfrm>
-          <a:prstGeom prst="rect">
-            <a:avLst/>
-          </a:prstGeom>
-          <a:noFill/>
-          <a:ln/>
-        </p:spPr>
-        <p:txBody>
-          <a:bodyPr wrap="square" lIns="0" tIns="0" rIns="0" bIns="0" rtlCol="0" anchor="ctr"/>
-          <a:lstStyle/>
-          <a:p>
-            <a:pPr algn="ctr" indent="0" marL="0">
-              <a:buNone/>
-            </a:pPr>
-            <a:r>
-              <a:rPr lang="en-US" sz="1450" b="1" dirty="0">
-                <a:solidFill>
-                  <a:srgbClr val="14293A"/>
-                </a:solidFill>
-                <a:latin typeface="Calibri" pitchFamily="34" charset="0"/>
-                <a:ea typeface="Calibri" pitchFamily="34" charset="-122"/>
-                <a:cs typeface="Calibri" pitchFamily="34" charset="-120"/>
-              </a:rPr>
-              <a:t>API GW + S3</a:t>
-            </a:r>
-            <a:endParaRPr lang="en-US" sz="1450" dirty="0"/>
-          </a:p>
-        </p:txBody>
-      </p:sp>
-      <p:sp>
-        <p:nvSpPr>
-          <p:cNvPr id="31" name="Text 29"/>
-          <p:cNvSpPr/>
-          <p:nvPr/>
-        </p:nvSpPr>
-        <p:spPr>
-          <a:xfrm>
-            <a:off x="9960559" y="3310128"/>
-            <a:ext cx="1609344" cy="457200"/>
-          </a:xfrm>
-          <a:prstGeom prst="rect">
-            <a:avLst/>
-          </a:prstGeom>
-          <a:noFill/>
-          <a:ln/>
-        </p:spPr>
-        <p:txBody>
-          <a:bodyPr wrap="square" lIns="0" tIns="0" rIns="0" bIns="0" rtlCol="0" anchor="t"/>
-          <a:lstStyle/>
-          <a:p>
-            <a:pPr algn="ctr" indent="0" marL="0">
-              <a:buNone/>
-            </a:pPr>
-            <a:r>
-              <a:rPr lang="en-US" sz="1050" dirty="0">
-                <a:solidFill>
-                  <a:srgbClr val="5A6E7C"/>
-                </a:solidFill>
-                <a:latin typeface="Calibri" pitchFamily="34" charset="0"/>
-                <a:ea typeface="Calibri" pitchFamily="34" charset="-122"/>
-                <a:cs typeface="Calibri" pitchFamily="34" charset="-120"/>
-              </a:rPr>
-              <a:t>live manifest</a:t>
-            </a:r>
-            <a:endParaRPr lang="en-US" sz="1050" dirty="0"/>
-          </a:p>
-        </p:txBody>
-      </p:sp>
-      <p:sp>
-        <p:nvSpPr>
           <p:cNvPr id="32" name="Text 30"/>
           <p:cNvSpPr/>
           <p:nvPr/>
         </p:nvSpPr>
         <p:spPr>
           <a:xfrm>
-            <a:off x="640080" y="3977640"/>
-            <a:ext cx="3440521" cy="274320"/>
-          </a:xfrm>
-          <a:prstGeom prst="rect">
-            <a:avLst/>
-          </a:prstGeom>
-          <a:noFill/>
-          <a:ln/>
-        </p:spPr>
-        <p:txBody>
-          <a:bodyPr wrap="square" rtlCol="0" anchor="ctr"/>
-          <a:lstStyle/>
-          <a:p>
-            <a:pPr algn="ctr" indent="0" marL="0">
-              <a:buNone/>
-            </a:pPr>
-            <a:r>
-              <a:rPr lang="en-US" sz="1100" b="1" spc="200" kern="0" dirty="0">
-                <a:solidFill>
-                  <a:srgbClr val="5A8FB0"/>
-                </a:solidFill>
-                <a:latin typeface="Calibri" pitchFamily="34" charset="0"/>
-                <a:ea typeface="Calibri" pitchFamily="34" charset="-122"/>
-                <a:cs typeface="Calibri" pitchFamily="34" charset="-120"/>
-              </a:rPr>
-              <a:t>EDGE</a:t>
-            </a:r>
-            <a:endParaRPr lang="en-US" sz="1100" dirty="0"/>
-          </a:p>
-        </p:txBody>
-      </p:sp>
-      <p:sp>
-        <p:nvSpPr>
-          <p:cNvPr id="33" name="Text 31"/>
-          <p:cNvSpPr/>
-          <p:nvPr/>
-        </p:nvSpPr>
-        <p:spPr>
-          <a:xfrm>
-            <a:off x="4375587" y="3977640"/>
-            <a:ext cx="7176028" cy="274320"/>
-          </a:xfrm>
-          <a:prstGeom prst="rect">
-            <a:avLst/>
-          </a:prstGeom>
-          <a:noFill/>
-          <a:ln/>
-        </p:spPr>
-        <p:txBody>
-          <a:bodyPr wrap="square" rtlCol="0" anchor="ctr"/>
-          <a:lstStyle/>
-          <a:p>
-            <a:pPr algn="ctr" indent="0" marL="0">
-              <a:buNone/>
-            </a:pPr>
-            <a:r>
-              <a:rPr lang="en-US" sz="1100" b="1" spc="200" kern="0" dirty="0">
-                <a:solidFill>
-                  <a:srgbClr val="1C4A6E"/>
-                </a:solidFill>
-                <a:latin typeface="Calibri" pitchFamily="34" charset="0"/>
-                <a:ea typeface="Calibri" pitchFamily="34" charset="-122"/>
-                <a:cs typeface="Calibri" pitchFamily="34" charset="-120"/>
-              </a:rPr>
-              <a:t>CLOUD</a:t>
-            </a:r>
-            <a:endParaRPr lang="en-US" sz="1100" dirty="0"/>
-          </a:p>
-        </p:txBody>
-      </p:sp>
-      <p:sp>
-        <p:nvSpPr>
-          <p:cNvPr id="34" name="Text 32"/>
-          <p:cNvSpPr/>
-          <p:nvPr/>
-        </p:nvSpPr>
-        <p:spPr>
-          <a:xfrm>
-            <a:off x="640080" y="5212080"/>
-            <a:ext cx="10972800" cy="640080"/>
+            <a:off x="640080" y="5257800"/>
+            <a:ext cx="10972800" cy="731520"/>
           </a:xfrm>
           <a:prstGeom prst="rect">
             <a:avLst/>
@@ -2675,8 +2640,35 @@
         </p:nvSpPr>
         <p:spPr>
           <a:xfrm>
-            <a:off x="731520" y="1965960"/>
-            <a:ext cx="685800" cy="685800"/>
+            <a:off x="640080" y="1874520"/>
+            <a:ext cx="3502152" cy="3657600"/>
+          </a:xfrm>
+          <a:prstGeom prst="roundRect">
+            <a:avLst>
+              <a:gd name="adj" fmla="val 2611"/>
+            </a:avLst>
+          </a:prstGeom>
+          <a:solidFill>
+            <a:srgbClr val="EEF4F8"/>
+          </a:solidFill>
+          <a:ln w="15240">
+            <a:solidFill>
+              <a:srgbClr val="2E6C93"/>
+            </a:solidFill>
+            <a:prstDash val="solid"/>
+          </a:ln>
+        </p:spPr>
+      </p:sp>
+      <p:sp>
+        <p:nvSpPr>
+          <p:cNvPr id="5" name="Shape 3"/>
+          <p:cNvSpPr/>
+          <p:nvPr/>
+        </p:nvSpPr>
+        <p:spPr>
+          <a:xfrm>
+            <a:off x="914400" y="2194560"/>
+            <a:ext cx="640080" cy="640080"/>
           </a:xfrm>
           <a:prstGeom prst="ellipse">
             <a:avLst/>
@@ -2689,14 +2681,14 @@
       </p:sp>
       <p:sp>
         <p:nvSpPr>
-          <p:cNvPr id="5" name="Text 3"/>
-          <p:cNvSpPr/>
-          <p:nvPr/>
-        </p:nvSpPr>
-        <p:spPr>
-          <a:xfrm>
-            <a:off x="731520" y="1965960"/>
-            <a:ext cx="685800" cy="685800"/>
+          <p:cNvPr id="6" name="Text 4"/>
+          <p:cNvSpPr/>
+          <p:nvPr/>
+        </p:nvSpPr>
+        <p:spPr>
+          <a:xfrm>
+            <a:off x="914400" y="2194560"/>
+            <a:ext cx="640080" cy="640080"/>
           </a:xfrm>
           <a:prstGeom prst="rect">
             <a:avLst/>
@@ -2712,7 +2704,7 @@
               <a:buNone/>
             </a:pPr>
             <a:r>
-              <a:rPr lang="en-US" sz="2600" b="1" dirty="0">
+              <a:rPr lang="en-US" sz="2400" b="1" dirty="0">
                 <a:solidFill>
                   <a:srgbClr val="FFFFFF"/>
                 </a:solidFill>
@@ -2722,20 +2714,20 @@
               </a:rPr>
               <a:t>1</a:t>
             </a:r>
-            <a:endParaRPr lang="en-US" sz="2600" dirty="0"/>
-          </a:p>
-        </p:txBody>
-      </p:sp>
-      <p:sp>
-        <p:nvSpPr>
-          <p:cNvPr id="6" name="Text 4"/>
-          <p:cNvSpPr/>
-          <p:nvPr/>
-        </p:nvSpPr>
-        <p:spPr>
-          <a:xfrm>
-            <a:off x="1691640" y="1920240"/>
-            <a:ext cx="9875520" cy="411480"/>
+            <a:endParaRPr lang="en-US" sz="2400" dirty="0"/>
+          </a:p>
+        </p:txBody>
+      </p:sp>
+      <p:sp>
+        <p:nvSpPr>
+          <p:cNvPr id="7" name="Text 5"/>
+          <p:cNvSpPr/>
+          <p:nvPr/>
+        </p:nvSpPr>
+        <p:spPr>
+          <a:xfrm>
+            <a:off x="914400" y="3017520"/>
+            <a:ext cx="2953512" cy="822960"/>
           </a:xfrm>
           <a:prstGeom prst="rect">
             <a:avLst/>
@@ -2751,7 +2743,7 @@
               <a:buNone/>
             </a:pPr>
             <a:r>
-              <a:rPr lang="en-US" sz="1800" b="1" dirty="0">
+              <a:rPr lang="en-US" sz="1700" b="1" dirty="0">
                 <a:solidFill>
                   <a:srgbClr val="14293A"/>
                 </a:solidFill>
@@ -2759,22 +2751,22 @@
                 <a:ea typeface="Calibri" pitchFamily="34" charset="-122"/>
                 <a:cs typeface="Calibri" pitchFamily="34" charset="-120"/>
               </a:rPr>
-              <a:t>Pipeline health, all green</a:t>
-            </a:r>
-            <a:endParaRPr lang="en-US" sz="1800" dirty="0"/>
-          </a:p>
-        </p:txBody>
-      </p:sp>
-      <p:sp>
-        <p:nvSpPr>
-          <p:cNvPr id="7" name="Text 5"/>
-          <p:cNvSpPr/>
-          <p:nvPr/>
-        </p:nvSpPr>
-        <p:spPr>
-          <a:xfrm>
-            <a:off x="1691640" y="2340864"/>
-            <a:ext cx="9875520" cy="640080"/>
+              <a:t>A live manifest per container</a:t>
+            </a:r>
+            <a:endParaRPr lang="en-US" sz="1700" dirty="0"/>
+          </a:p>
+        </p:txBody>
+      </p:sp>
+      <p:sp>
+        <p:nvSpPr>
+          <p:cNvPr id="8" name="Text 6"/>
+          <p:cNvSpPr/>
+          <p:nvPr/>
+        </p:nvSpPr>
+        <p:spPr>
+          <a:xfrm>
+            <a:off x="914400" y="3794760"/>
+            <a:ext cx="2953512" cy="1554480"/>
           </a:xfrm>
           <a:prstGeom prst="rect">
             <a:avLst/>
@@ -2787,10 +2779,13 @@
           <a:lstStyle/>
           <a:p>
             <a:pPr indent="0" marL="0">
-              <a:buNone/>
-            </a:pPr>
-            <a:r>
-              <a:rPr lang="en-US" sz="1350" dirty="0">
+              <a:lnSpc>
+                <a:spcPct val="105000"/>
+              </a:lnSpc>
+              <a:buNone/>
+            </a:pPr>
+            <a:r>
+              <a:rPr lang="en-US" sz="1300" dirty="0">
                 <a:solidFill>
                   <a:srgbClr val="5A6E7C"/>
                 </a:solidFill>
@@ -2798,22 +2793,49 @@
                 <a:ea typeface="Calibri" pitchFamily="34" charset="-122"/>
                 <a:cs typeface="Calibri" pitchFamily="34" charset="-120"/>
               </a:rPr>
-              <a:t>Depot relay online, queue reachable, Lambda deployed and records archiving and climbing.</a:t>
-            </a:r>
-            <a:endParaRPr lang="en-US" sz="1350" dirty="0"/>
-          </a:p>
-        </p:txBody>
-      </p:sp>
-      <p:sp>
-        <p:nvSpPr>
-          <p:cNvPr id="8" name="Shape 6"/>
-          <p:cNvSpPr/>
-          <p:nvPr/>
-        </p:nvSpPr>
-        <p:spPr>
-          <a:xfrm>
-            <a:off x="731520" y="3383280"/>
-            <a:ext cx="685800" cy="685800"/>
+              <a:t>Storage temperature, humidity, door-open time, shock and CO2 for both reefers, re-scored every ten seconds.</a:t>
+            </a:r>
+            <a:endParaRPr lang="en-US" sz="1300" dirty="0"/>
+          </a:p>
+        </p:txBody>
+      </p:sp>
+      <p:sp>
+        <p:nvSpPr>
+          <p:cNvPr id="9" name="Shape 7"/>
+          <p:cNvSpPr/>
+          <p:nvPr/>
+        </p:nvSpPr>
+        <p:spPr>
+          <a:xfrm>
+            <a:off x="4416552" y="1874520"/>
+            <a:ext cx="3502152" cy="3657600"/>
+          </a:xfrm>
+          <a:prstGeom prst="roundRect">
+            <a:avLst>
+              <a:gd name="adj" fmla="val 2611"/>
+            </a:avLst>
+          </a:prstGeom>
+          <a:solidFill>
+            <a:srgbClr val="EEF4F8"/>
+          </a:solidFill>
+          <a:ln w="15240">
+            <a:solidFill>
+              <a:srgbClr val="2E6C93"/>
+            </a:solidFill>
+            <a:prstDash val="solid"/>
+          </a:ln>
+        </p:spPr>
+      </p:sp>
+      <p:sp>
+        <p:nvSpPr>
+          <p:cNvPr id="10" name="Shape 8"/>
+          <p:cNvSpPr/>
+          <p:nvPr/>
+        </p:nvSpPr>
+        <p:spPr>
+          <a:xfrm>
+            <a:off x="4690872" y="2194560"/>
+            <a:ext cx="640080" cy="640080"/>
           </a:xfrm>
           <a:prstGeom prst="ellipse">
             <a:avLst/>
@@ -2826,14 +2848,14 @@
       </p:sp>
       <p:sp>
         <p:nvSpPr>
-          <p:cNvPr id="9" name="Text 7"/>
-          <p:cNvSpPr/>
-          <p:nvPr/>
-        </p:nvSpPr>
-        <p:spPr>
-          <a:xfrm>
-            <a:off x="731520" y="3383280"/>
-            <a:ext cx="685800" cy="685800"/>
+          <p:cNvPr id="11" name="Text 9"/>
+          <p:cNvSpPr/>
+          <p:nvPr/>
+        </p:nvSpPr>
+        <p:spPr>
+          <a:xfrm>
+            <a:off x="4690872" y="2194560"/>
+            <a:ext cx="640080" cy="640080"/>
           </a:xfrm>
           <a:prstGeom prst="rect">
             <a:avLst/>
@@ -2849,7 +2871,7 @@
               <a:buNone/>
             </a:pPr>
             <a:r>
-              <a:rPr lang="en-US" sz="2600" b="1" dirty="0">
+              <a:rPr lang="en-US" sz="2400" b="1" dirty="0">
                 <a:solidFill>
                   <a:srgbClr val="FFFFFF"/>
                 </a:solidFill>
@@ -2859,20 +2881,20 @@
               </a:rPr>
               <a:t>2</a:t>
             </a:r>
-            <a:endParaRPr lang="en-US" sz="2600" dirty="0"/>
-          </a:p>
-        </p:txBody>
-      </p:sp>
-      <p:sp>
-        <p:nvSpPr>
-          <p:cNvPr id="10" name="Text 8"/>
-          <p:cNvSpPr/>
-          <p:nvPr/>
-        </p:nvSpPr>
-        <p:spPr>
-          <a:xfrm>
-            <a:off x="1691640" y="3337560"/>
-            <a:ext cx="9875520" cy="411480"/>
+            <a:endParaRPr lang="en-US" sz="2400" dirty="0"/>
+          </a:p>
+        </p:txBody>
+      </p:sp>
+      <p:sp>
+        <p:nvSpPr>
+          <p:cNvPr id="12" name="Text 10"/>
+          <p:cNvSpPr/>
+          <p:nvPr/>
+        </p:nvSpPr>
+        <p:spPr>
+          <a:xfrm>
+            <a:off x="4690872" y="3017520"/>
+            <a:ext cx="2953512" cy="822960"/>
           </a:xfrm>
           <a:prstGeom prst="rect">
             <a:avLst/>
@@ -2888,7 +2910,7 @@
               <a:buNone/>
             </a:pPr>
             <a:r>
-              <a:rPr lang="en-US" sz="1800" b="1" dirty="0">
+              <a:rPr lang="en-US" sz="1700" b="1" dirty="0">
                 <a:solidFill>
                   <a:srgbClr val="14293A"/>
                 </a:solidFill>
@@ -2896,22 +2918,22 @@
                 <a:ea typeface="Calibri" pitchFamily="34" charset="-122"/>
                 <a:cs typeface="Calibri" pitchFamily="34" charset="-120"/>
               </a:rPr>
-              <a:t>Live manifest, exceptions firing</a:t>
-            </a:r>
-            <a:endParaRPr lang="en-US" sz="1800" dirty="0"/>
-          </a:p>
-        </p:txBody>
-      </p:sp>
-      <p:sp>
-        <p:nvSpPr>
-          <p:cNvPr id="11" name="Text 9"/>
-          <p:cNvSpPr/>
-          <p:nvPr/>
-        </p:nvSpPr>
-        <p:spPr>
-          <a:xfrm>
-            <a:off x="1691640" y="3758184"/>
-            <a:ext cx="9875520" cy="640080"/>
+              <a:t>An excursion flagged on the board</a:t>
+            </a:r>
+            <a:endParaRPr lang="en-US" sz="1700" dirty="0"/>
+          </a:p>
+        </p:txBody>
+      </p:sp>
+      <p:sp>
+        <p:nvSpPr>
+          <p:cNvPr id="13" name="Text 11"/>
+          <p:cNvSpPr/>
+          <p:nvPr/>
+        </p:nvSpPr>
+        <p:spPr>
+          <a:xfrm>
+            <a:off x="4690872" y="3794760"/>
+            <a:ext cx="2953512" cy="1554480"/>
           </a:xfrm>
           <a:prstGeom prst="rect">
             <a:avLst/>
@@ -2924,10 +2946,13 @@
           <a:lstStyle/>
           <a:p>
             <a:pPr indent="0" marL="0">
-              <a:buNone/>
-            </a:pPr>
-            <a:r>
-              <a:rPr lang="en-US" sz="1350" dirty="0">
+              <a:lnSpc>
+                <a:spcPct val="105000"/>
+              </a:lnSpc>
+              <a:buNone/>
+            </a:pPr>
+            <a:r>
+              <a:rPr lang="en-US" sz="1300" dirty="0">
                 <a:solidFill>
                   <a:srgbClr val="5A6E7C"/>
                 </a:solidFill>
@@ -2935,22 +2960,49 @@
                 <a:ea typeface="Calibri" pitchFamily="34" charset="-122"/>
                 <a:cs typeface="Calibri" pitchFamily="34" charset="-120"/>
               </a:rPr>
-              <a:t>Per-container manifest and storage-temperature trends, with any container above −15 °C flagged on the board within ten seconds.</a:t>
-            </a:r>
-            <a:endParaRPr lang="en-US" sz="1350" dirty="0"/>
-          </a:p>
-        </p:txBody>
-      </p:sp>
-      <p:sp>
-        <p:nvSpPr>
-          <p:cNvPr id="12" name="Shape 10"/>
-          <p:cNvSpPr/>
-          <p:nvPr/>
-        </p:nvSpPr>
-        <p:spPr>
-          <a:xfrm>
-            <a:off x="731520" y="4800600"/>
-            <a:ext cx="685800" cy="685800"/>
+              <a:t>A container whose window-average temperature rises above -15 C is flagged as a cold-chain breach within one window, shown against the storage-temperature trend.</a:t>
+            </a:r>
+            <a:endParaRPr lang="en-US" sz="1300" dirty="0"/>
+          </a:p>
+        </p:txBody>
+      </p:sp>
+      <p:sp>
+        <p:nvSpPr>
+          <p:cNvPr id="14" name="Shape 12"/>
+          <p:cNvSpPr/>
+          <p:nvPr/>
+        </p:nvSpPr>
+        <p:spPr>
+          <a:xfrm>
+            <a:off x="8193024" y="1874520"/>
+            <a:ext cx="3502152" cy="3657600"/>
+          </a:xfrm>
+          <a:prstGeom prst="roundRect">
+            <a:avLst>
+              <a:gd name="adj" fmla="val 2611"/>
+            </a:avLst>
+          </a:prstGeom>
+          <a:solidFill>
+            <a:srgbClr val="EEF4F8"/>
+          </a:solidFill>
+          <a:ln w="15240">
+            <a:solidFill>
+              <a:srgbClr val="2E6C93"/>
+            </a:solidFill>
+            <a:prstDash val="solid"/>
+          </a:ln>
+        </p:spPr>
+      </p:sp>
+      <p:sp>
+        <p:nvSpPr>
+          <p:cNvPr id="15" name="Shape 13"/>
+          <p:cNvSpPr/>
+          <p:nvPr/>
+        </p:nvSpPr>
+        <p:spPr>
+          <a:xfrm>
+            <a:off x="8467344" y="2194560"/>
+            <a:ext cx="640080" cy="640080"/>
           </a:xfrm>
           <a:prstGeom prst="ellipse">
             <a:avLst/>
@@ -2963,14 +3015,14 @@
       </p:sp>
       <p:sp>
         <p:nvSpPr>
-          <p:cNvPr id="13" name="Text 11"/>
-          <p:cNvSpPr/>
-          <p:nvPr/>
-        </p:nvSpPr>
-        <p:spPr>
-          <a:xfrm>
-            <a:off x="731520" y="4800600"/>
-            <a:ext cx="685800" cy="685800"/>
+          <p:cNvPr id="16" name="Text 14"/>
+          <p:cNvSpPr/>
+          <p:nvPr/>
+        </p:nvSpPr>
+        <p:spPr>
+          <a:xfrm>
+            <a:off x="8467344" y="2194560"/>
+            <a:ext cx="640080" cy="640080"/>
           </a:xfrm>
           <a:prstGeom prst="rect">
             <a:avLst/>
@@ -2986,7 +3038,7 @@
               <a:buNone/>
             </a:pPr>
             <a:r>
-              <a:rPr lang="en-US" sz="2600" b="1" dirty="0">
+              <a:rPr lang="en-US" sz="2400" b="1" dirty="0">
                 <a:solidFill>
                   <a:srgbClr val="FFFFFF"/>
                 </a:solidFill>
@@ -2996,20 +3048,20 @@
               </a:rPr>
               <a:t>3</a:t>
             </a:r>
-            <a:endParaRPr lang="en-US" sz="2600" dirty="0"/>
-          </a:p>
-        </p:txBody>
-      </p:sp>
-      <p:sp>
-        <p:nvSpPr>
-          <p:cNvPr id="14" name="Text 12"/>
-          <p:cNvSpPr/>
-          <p:nvPr/>
-        </p:nvSpPr>
-        <p:spPr>
-          <a:xfrm>
-            <a:off x="1691640" y="4754880"/>
-            <a:ext cx="9875520" cy="411480"/>
+            <a:endParaRPr lang="en-US" sz="2400" dirty="0"/>
+          </a:p>
+        </p:txBody>
+      </p:sp>
+      <p:sp>
+        <p:nvSpPr>
+          <p:cNvPr id="17" name="Text 15"/>
+          <p:cNvSpPr/>
+          <p:nvPr/>
+        </p:nvSpPr>
+        <p:spPr>
+          <a:xfrm>
+            <a:off x="8467344" y="3017520"/>
+            <a:ext cx="2953512" cy="822960"/>
           </a:xfrm>
           <a:prstGeom prst="rect">
             <a:avLst/>
@@ -3025,7 +3077,7 @@
               <a:buNone/>
             </a:pPr>
             <a:r>
-              <a:rPr lang="en-US" sz="1800" b="1" dirty="0">
+              <a:rPr lang="en-US" sz="1700" b="1" dirty="0">
                 <a:solidFill>
                   <a:srgbClr val="14293A"/>
                 </a:solidFill>
@@ -3033,22 +3085,22 @@
                 <a:ea typeface="Calibri" pitchFamily="34" charset="-122"/>
                 <a:cs typeface="Calibri" pitchFamily="34" charset="-120"/>
               </a:rPr>
-              <a:t>Tested and scales</a:t>
-            </a:r>
-            <a:endParaRPr lang="en-US" sz="1800" dirty="0"/>
-          </a:p>
-        </p:txBody>
-      </p:sp>
-      <p:sp>
-        <p:nvSpPr>
-          <p:cNvPr id="15" name="Text 13"/>
-          <p:cNvSpPr/>
-          <p:nvPr/>
-        </p:nvSpPr>
-        <p:spPr>
-          <a:xfrm>
-            <a:off x="1691640" y="5175504"/>
-            <a:ext cx="9875520" cy="640080"/>
+              <a:t>Temperature trends per container</a:t>
+            </a:r>
+            <a:endParaRPr lang="en-US" sz="1700" dirty="0"/>
+          </a:p>
+        </p:txBody>
+      </p:sp>
+      <p:sp>
+        <p:nvSpPr>
+          <p:cNvPr id="18" name="Text 16"/>
+          <p:cNvSpPr/>
+          <p:nvPr/>
+        </p:nvSpPr>
+        <p:spPr>
+          <a:xfrm>
+            <a:off x="8467344" y="3794760"/>
+            <a:ext cx="2953512" cy="1554480"/>
           </a:xfrm>
           <a:prstGeom prst="rect">
             <a:avLst/>
@@ -3061,10 +3113,13 @@
           <a:lstStyle/>
           <a:p>
             <a:pPr indent="0" marL="0">
-              <a:buNone/>
-            </a:pPr>
-            <a:r>
-              <a:rPr lang="en-US" sz="1350" dirty="0">
+              <a:lnSpc>
+                <a:spcPct val="105000"/>
+              </a:lnSpc>
+              <a:buNone/>
+            </a:pPr>
+            <a:r>
+              <a:rPr lang="en-US" sz="1300" dirty="0">
                 <a:solidFill>
                   <a:srgbClr val="5A6E7C"/>
                 </a:solidFill>
@@ -3072,15 +3127,15 @@
                 <a:ea typeface="Calibri" pitchFamily="34" charset="-122"/>
                 <a:cs typeface="Calibri" pitchFamily="34" charset="-120"/>
               </a:rPr>
-              <a:t>76 automated tests run with pytest across ten modules; a 2,000-message burst absorbed, batched ten per SQS call.</a:t>
-            </a:r>
-            <a:endParaRPr lang="en-US" sz="1350" dirty="0"/>
-          </a:p>
-        </p:txBody>
-      </p:sp>
-      <p:sp>
-        <p:nvSpPr>
-          <p:cNvPr id="16" name="Text 14"/>
+              <a:t>The storage-temperature charts show each container's live series, so a container drifting warm is visible before it breaches.</a:t>
+            </a:r>
+            <a:endParaRPr lang="en-US" sz="1300" dirty="0"/>
+          </a:p>
+        </p:txBody>
+      </p:sp>
+      <p:sp>
+        <p:nvSpPr>
+          <p:cNvPr id="19" name="Text 17"/>
           <p:cNvSpPr/>
           <p:nvPr/>
         </p:nvSpPr>
@@ -3157,24 +3212,24 @@
         </p:nvSpPr>
         <p:spPr>
           <a:xfrm>
-            <a:off x="640080" y="640080"/>
-            <a:ext cx="10972800" cy="640080"/>
-          </a:xfrm>
-          <a:prstGeom prst="rect">
-            <a:avLst/>
-          </a:prstGeom>
-          <a:noFill/>
-          <a:ln/>
-        </p:spPr>
-        <p:txBody>
-          <a:bodyPr wrap="square" rtlCol="0" anchor="ctr"/>
+            <a:off x="640080" y="594360"/>
+            <a:ext cx="10972800" cy="822960"/>
+          </a:xfrm>
+          <a:prstGeom prst="rect">
+            <a:avLst/>
+          </a:prstGeom>
+          <a:noFill/>
+          <a:ln/>
+        </p:spPr>
+        <p:txBody>
+          <a:bodyPr wrap="square" rtlCol="0" anchor="t"/>
           <a:lstStyle/>
           <a:p>
             <a:pPr indent="0" marL="0">
               <a:buNone/>
             </a:pPr>
             <a:r>
-              <a:rPr lang="en-US" sz="3000" b="1" dirty="0">
+              <a:rPr lang="en-US" sz="2800" b="1" dirty="0">
                 <a:solidFill>
                   <a:srgbClr val="FFFFFF"/>
                 </a:solidFill>
@@ -3184,7 +3239,7 @@
               </a:rPr>
               <a:t>Hardest Part — the runtime is not the laptop</a:t>
             </a:r>
-            <a:endParaRPr lang="en-US" sz="3000" dirty="0"/>
+            <a:endParaRPr lang="en-US" sz="2800" dirty="0"/>
           </a:p>
         </p:txBody>
       </p:sp>
@@ -3196,12 +3251,12 @@
         </p:nvSpPr>
         <p:spPr>
           <a:xfrm>
-            <a:off x="731520" y="1920240"/>
-            <a:ext cx="10698480" cy="1965960"/>
+            <a:off x="731520" y="1874520"/>
+            <a:ext cx="5212080" cy="4160520"/>
           </a:xfrm>
           <a:prstGeom prst="roundRect">
             <a:avLst>
-              <a:gd name="adj" fmla="val 4651"/>
+              <a:gd name="adj" fmla="val 2198"/>
             </a:avLst>
           </a:prstGeom>
           <a:solidFill>
@@ -3223,7 +3278,7 @@
         </p:nvSpPr>
         <p:spPr>
           <a:xfrm>
-            <a:off x="1005840" y="2103120"/>
+            <a:off x="1051560" y="2103120"/>
             <a:ext cx="3657600" cy="457200"/>
           </a:xfrm>
           <a:prstGeom prst="rect">
@@ -3262,8 +3317,8 @@
         </p:nvSpPr>
         <p:spPr>
           <a:xfrm>
-            <a:off x="1005840" y="2578608"/>
-            <a:ext cx="9966960" cy="1188720"/>
+            <a:off x="1051560" y="2651760"/>
+            <a:ext cx="4572000" cy="3200400"/>
           </a:xfrm>
           <a:prstGeom prst="rect">
             <a:avLst/>
@@ -3277,12 +3332,12 @@
           <a:p>
             <a:pPr indent="0" marL="0">
               <a:lnSpc>
-                <a:spcPct val="105000"/>
+                <a:spcPct val="110000"/>
               </a:lnSpc>
               <a:buNone/>
             </a:pPr>
             <a:r>
-              <a:rPr lang="en-US" sz="1300" dirty="0">
+              <a:rPr lang="en-US" sz="1350" dirty="0">
                 <a:solidFill>
                   <a:srgbClr val="CFE0EC"/>
                 </a:solidFill>
@@ -3292,7 +3347,7 @@
               </a:rPr>
               <a:t>The FastAPI dashboard would not even start on Lambda, for two reasons at once: a dependency with a compiled native part had been packaged as the copy built on my Mac, which the Linux runtime cannot import; and a static-asset folder was mounted at import time even though that folder ships to S3, not into the function. Both are import-time failures that passed all 76 local tests.</a:t>
             </a:r>
-            <a:endParaRPr lang="en-US" sz="1300" dirty="0"/>
+            <a:endParaRPr lang="en-US" sz="1350" dirty="0"/>
           </a:p>
         </p:txBody>
       </p:sp>
@@ -3304,12 +3359,12 @@
         </p:nvSpPr>
         <p:spPr>
           <a:xfrm>
-            <a:off x="731520" y="4041648"/>
-            <a:ext cx="10698480" cy="1965960"/>
+            <a:off x="6263640" y="1874520"/>
+            <a:ext cx="5212080" cy="4160520"/>
           </a:xfrm>
           <a:prstGeom prst="roundRect">
             <a:avLst>
-              <a:gd name="adj" fmla="val 4651"/>
+              <a:gd name="adj" fmla="val 2198"/>
             </a:avLst>
           </a:prstGeom>
           <a:solidFill>
@@ -3331,7 +3386,7 @@
         </p:nvSpPr>
         <p:spPr>
           <a:xfrm>
-            <a:off x="1005840" y="4224528"/>
+            <a:off x="6583680" y="2103120"/>
             <a:ext cx="3657600" cy="457200"/>
           </a:xfrm>
           <a:prstGeom prst="rect">
@@ -3370,8 +3425,8 @@
         </p:nvSpPr>
         <p:spPr>
           <a:xfrm>
-            <a:off x="1005840" y="4700016"/>
-            <a:ext cx="9966960" cy="1188720"/>
+            <a:off x="6583680" y="2651760"/>
+            <a:ext cx="4572000" cy="3200400"/>
           </a:xfrm>
           <a:prstGeom prst="rect">
             <a:avLst/>
@@ -3385,12 +3440,12 @@
           <a:p>
             <a:pPr indent="0" marL="0">
               <a:lnSpc>
-                <a:spcPct val="105000"/>
+                <a:spcPct val="110000"/>
               </a:lnSpc>
               <a:buNone/>
             </a:pPr>
             <a:r>
-              <a:rPr lang="en-US" sz="1300" dirty="0">
+              <a:rPr lang="en-US" sz="1350" dirty="0">
                 <a:solidFill>
                   <a:srgbClr val="CFE0EC"/>
                 </a:solidFill>
@@ -3400,7 +3455,7 @@
               </a:rPr>
               <a:t>The deployment package is now built against the Linux runtime's own platform so the native dependency matches, and the static mount is made tolerant of an absent folder. The dashboard returned healthy on the very first live poll.</a:t>
             </a:r>
-            <a:endParaRPr lang="en-US" sz="1300" dirty="0"/>
+            <a:endParaRPr lang="en-US" sz="1350" dirty="0"/>
           </a:p>
         </p:txBody>
       </p:sp>

--- a/ppt/SrinidhiVutkoori_X25173243_cold-chain-logistics.pptx
+++ b/ppt/SrinidhiVutkoori_X25173243_cold-chain-logistics.pptx
@@ -3186,7 +3186,7 @@
     <p:bg>
       <p:bgPr>
         <a:solidFill>
-          <a:srgbClr val="122536"/>
+          <a:srgbClr val="FFFFFF"/>
         </a:solidFill>
       </p:bgPr>
     </p:bg>
@@ -3212,7 +3212,7 @@
         </p:nvSpPr>
         <p:spPr>
           <a:xfrm>
-            <a:off x="640080" y="594360"/>
+            <a:off x="640080" y="502920"/>
             <a:ext cx="10972800" cy="822960"/>
           </a:xfrm>
           <a:prstGeom prst="rect">
@@ -3231,7 +3231,7 @@
             <a:r>
               <a:rPr lang="en-US" sz="2800" b="1" dirty="0">
                 <a:solidFill>
-                  <a:srgbClr val="FFFFFF"/>
+                  <a:srgbClr val="14293A"/>
                 </a:solidFill>
                 <a:latin typeface="Cambria" pitchFamily="34" charset="0"/>
                 <a:ea typeface="Cambria" pitchFamily="34" charset="-122"/>
@@ -3251,8 +3251,8 @@
         </p:nvSpPr>
         <p:spPr>
           <a:xfrm>
-            <a:off x="731520" y="1874520"/>
-            <a:ext cx="5212080" cy="4160520"/>
+            <a:off x="640080" y="1874520"/>
+            <a:ext cx="4937760" cy="4160520"/>
           </a:xfrm>
           <a:prstGeom prst="roundRect">
             <a:avLst>
@@ -3260,9 +3260,9 @@
             </a:avLst>
           </a:prstGeom>
           <a:solidFill>
-            <a:srgbClr val="1B3A50"/>
-          </a:solidFill>
-          <a:ln w="15875">
+            <a:srgbClr val="EEF4F8"/>
+          </a:solidFill>
+          <a:ln w="19050">
             <a:solidFill>
               <a:srgbClr val="E1A93C"/>
             </a:solidFill>
@@ -3278,7 +3278,7 @@
         </p:nvSpPr>
         <p:spPr>
           <a:xfrm>
-            <a:off x="1051560" y="2103120"/>
+            <a:off x="960120" y="2103120"/>
             <a:ext cx="3657600" cy="457200"/>
           </a:xfrm>
           <a:prstGeom prst="rect">
@@ -3317,8 +3317,8 @@
         </p:nvSpPr>
         <p:spPr>
           <a:xfrm>
-            <a:off x="1051560" y="2651760"/>
-            <a:ext cx="4572000" cy="3200400"/>
+            <a:off x="960120" y="2651760"/>
+            <a:ext cx="4343400" cy="3200400"/>
           </a:xfrm>
           <a:prstGeom prst="rect">
             <a:avLst/>
@@ -3332,14 +3332,14 @@
           <a:p>
             <a:pPr indent="0" marL="0">
               <a:lnSpc>
-                <a:spcPct val="110000"/>
+                <a:spcPct val="112000"/>
               </a:lnSpc>
               <a:buNone/>
             </a:pPr>
             <a:r>
               <a:rPr lang="en-US" sz="1350" dirty="0">
                 <a:solidFill>
-                  <a:srgbClr val="CFE0EC"/>
+                  <a:srgbClr val="14293A"/>
                 </a:solidFill>
                 <a:latin typeface="Calibri" pitchFamily="34" charset="0"/>
                 <a:ea typeface="Calibri" pitchFamily="34" charset="-122"/>
@@ -3359,8 +3359,8 @@
         </p:nvSpPr>
         <p:spPr>
           <a:xfrm>
-            <a:off x="6263640" y="1874520"/>
-            <a:ext cx="5212080" cy="4160520"/>
+            <a:off x="6611112" y="1874520"/>
+            <a:ext cx="4937760" cy="4160520"/>
           </a:xfrm>
           <a:prstGeom prst="roundRect">
             <a:avLst>
@@ -3368,11 +3368,11 @@
             </a:avLst>
           </a:prstGeom>
           <a:solidFill>
-            <a:srgbClr val="1B3A50"/>
-          </a:solidFill>
-          <a:ln w="15875">
+            <a:srgbClr val="EEF4F8"/>
+          </a:solidFill>
+          <a:ln w="19050">
             <a:solidFill>
-              <a:srgbClr val="5A8FB0"/>
+              <a:srgbClr val="2E6C93"/>
             </a:solidFill>
             <a:prstDash val="solid"/>
           </a:ln>
@@ -3386,7 +3386,7 @@
         </p:nvSpPr>
         <p:spPr>
           <a:xfrm>
-            <a:off x="6583680" y="2103120"/>
+            <a:off x="6931152" y="2103120"/>
             <a:ext cx="3657600" cy="457200"/>
           </a:xfrm>
           <a:prstGeom prst="rect">
@@ -3405,7 +3405,7 @@
             <a:r>
               <a:rPr lang="en-US" sz="1900" b="1" dirty="0">
                 <a:solidFill>
-                  <a:srgbClr val="5A8FB0"/>
+                  <a:srgbClr val="2E6C93"/>
                 </a:solidFill>
                 <a:latin typeface="Cambria" pitchFamily="34" charset="0"/>
                 <a:ea typeface="Cambria" pitchFamily="34" charset="-122"/>
@@ -3425,8 +3425,8 @@
         </p:nvSpPr>
         <p:spPr>
           <a:xfrm>
-            <a:off x="6583680" y="2651760"/>
-            <a:ext cx="4572000" cy="3200400"/>
+            <a:off x="6931152" y="2651760"/>
+            <a:ext cx="4343400" cy="3200400"/>
           </a:xfrm>
           <a:prstGeom prst="rect">
             <a:avLst/>
@@ -3440,14 +3440,14 @@
           <a:p>
             <a:pPr indent="0" marL="0">
               <a:lnSpc>
-                <a:spcPct val="110000"/>
+                <a:spcPct val="112000"/>
               </a:lnSpc>
               <a:buNone/>
             </a:pPr>
             <a:r>
               <a:rPr lang="en-US" sz="1350" dirty="0">
                 <a:solidFill>
-                  <a:srgbClr val="CFE0EC"/>
+                  <a:srgbClr val="14293A"/>
                 </a:solidFill>
                 <a:latin typeface="Calibri" pitchFamily="34" charset="0"/>
                 <a:ea typeface="Calibri" pitchFamily="34" charset="-122"/>
@@ -3458,6 +3458,26 @@
             <a:endParaRPr lang="en-US" sz="1350" dirty="0"/>
           </a:p>
         </p:txBody>
+      </p:sp>
+      <p:sp>
+        <p:nvSpPr>
+          <p:cNvPr id="9" name="Shape 7"/>
+          <p:cNvSpPr/>
+          <p:nvPr/>
+        </p:nvSpPr>
+        <p:spPr>
+          <a:xfrm>
+            <a:off x="5669280" y="3703320"/>
+            <a:ext cx="841248" cy="512064"/>
+          </a:xfrm>
+          <a:prstGeom prst="rightArrow">
+            <a:avLst/>
+          </a:prstGeom>
+          <a:solidFill>
+            <a:srgbClr val="1C4A6E"/>
+          </a:solidFill>
+          <a:ln/>
+        </p:spPr>
       </p:sp>
     </p:spTree>
   </p:cSld>

--- a/ppt/SrinidhiVutkoori_X25173243_cold-chain-logistics.pptx
+++ b/ppt/SrinidhiVutkoori_X25173243_cold-chain-logistics.pptx
@@ -1617,12 +1617,12 @@
         </p:nvSpPr>
         <p:spPr>
           <a:xfrm>
-            <a:off x="640080" y="1874520"/>
-            <a:ext cx="2286000" cy="1280160"/>
+            <a:off x="640080" y="2468880"/>
+            <a:ext cx="1572768" cy="1371600"/>
           </a:xfrm>
           <a:prstGeom prst="roundRect">
             <a:avLst>
-              <a:gd name="adj" fmla="val 7143"/>
+              <a:gd name="adj" fmla="val 6667"/>
             </a:avLst>
           </a:prstGeom>
           <a:solidFill>
@@ -1644,7 +1644,7 @@
         </p:nvSpPr>
         <p:spPr>
           <a:xfrm>
-            <a:off x="1691640" y="2039112"/>
+            <a:off x="1335024" y="2633472"/>
             <a:ext cx="182880" cy="182880"/>
           </a:xfrm>
           <a:prstGeom prst="ellipse">
@@ -1664,8 +1664,8 @@
         </p:nvSpPr>
         <p:spPr>
           <a:xfrm>
-            <a:off x="612648" y="2258568"/>
-            <a:ext cx="2340864" cy="365760"/>
+            <a:off x="612648" y="2852928"/>
+            <a:ext cx="1627632" cy="365760"/>
           </a:xfrm>
           <a:prstGeom prst="rect">
             <a:avLst/>
@@ -1703,8 +1703,8 @@
         </p:nvSpPr>
         <p:spPr>
           <a:xfrm>
-            <a:off x="640080" y="2606040"/>
-            <a:ext cx="2286000" cy="411480"/>
+            <a:off x="640080" y="3200400"/>
+            <a:ext cx="1572768" cy="411480"/>
           </a:xfrm>
           <a:prstGeom prst="rect">
             <a:avLst/>
@@ -1742,733 +1742,8 @@
         </p:nvSpPr>
         <p:spPr>
           <a:xfrm>
-            <a:off x="2944368" y="2514600"/>
-            <a:ext cx="1975104" cy="0"/>
-          </a:xfrm>
-          <a:prstGeom prst="line">
-            <a:avLst/>
-          </a:prstGeom>
-          <a:noFill/>
-          <a:ln w="25400">
-            <a:solidFill>
-              <a:srgbClr val="5A8FB0"/>
-            </a:solidFill>
-            <a:prstDash val="solid"/>
-            <a:headEnd type="none"/>
-            <a:tailEnd type="triangle"/>
-          </a:ln>
-        </p:spPr>
-      </p:sp>
-      <p:sp>
-        <p:nvSpPr>
-          <p:cNvPr id="8" name="Shape 6"/>
-          <p:cNvSpPr/>
-          <p:nvPr/>
-        </p:nvSpPr>
-        <p:spPr>
-          <a:xfrm>
-            <a:off x="4937760" y="1874520"/>
-            <a:ext cx="2286000" cy="1280160"/>
-          </a:xfrm>
-          <a:prstGeom prst="roundRect">
-            <a:avLst>
-              <a:gd name="adj" fmla="val 7143"/>
-            </a:avLst>
-          </a:prstGeom>
-          <a:solidFill>
-            <a:srgbClr val="EEF4F8"/>
-          </a:solidFill>
-          <a:ln w="19050">
-            <a:solidFill>
-              <a:srgbClr val="5A8FB0"/>
-            </a:solidFill>
-            <a:prstDash val="solid"/>
-          </a:ln>
-        </p:spPr>
-      </p:sp>
-      <p:sp>
-        <p:nvSpPr>
-          <p:cNvPr id="9" name="Shape 7"/>
-          <p:cNvSpPr/>
-          <p:nvPr/>
-        </p:nvSpPr>
-        <p:spPr>
-          <a:xfrm>
-            <a:off x="5989320" y="2039112"/>
-            <a:ext cx="182880" cy="182880"/>
-          </a:xfrm>
-          <a:prstGeom prst="ellipse">
-            <a:avLst/>
-          </a:prstGeom>
-          <a:solidFill>
-            <a:srgbClr val="5A8FB0"/>
-          </a:solidFill>
-          <a:ln/>
-        </p:spPr>
-      </p:sp>
-      <p:sp>
-        <p:nvSpPr>
-          <p:cNvPr id="10" name="Text 8"/>
-          <p:cNvSpPr/>
-          <p:nvPr/>
-        </p:nvSpPr>
-        <p:spPr>
-          <a:xfrm>
-            <a:off x="4910328" y="2258568"/>
-            <a:ext cx="2340864" cy="365760"/>
-          </a:xfrm>
-          <a:prstGeom prst="rect">
-            <a:avLst/>
-          </a:prstGeom>
-          <a:noFill/>
-          <a:ln/>
-        </p:spPr>
-        <p:txBody>
-          <a:bodyPr wrap="square" lIns="0" tIns="0" rIns="0" bIns="0" rtlCol="0" anchor="ctr"/>
-          <a:lstStyle/>
-          <a:p>
-            <a:pPr algn="ctr" indent="0" marL="0">
-              <a:buNone/>
-            </a:pPr>
-            <a:r>
-              <a:rPr lang="en-US" sz="1450" b="1" dirty="0">
-                <a:solidFill>
-                  <a:srgbClr val="14293A"/>
-                </a:solidFill>
-                <a:latin typeface="Calibri" pitchFamily="34" charset="0"/>
-                <a:ea typeface="Calibri" pitchFamily="34" charset="-122"/>
-                <a:cs typeface="Calibri" pitchFamily="34" charset="-120"/>
-              </a:rPr>
-              <a:t>Depot relay</a:t>
-            </a:r>
-            <a:endParaRPr lang="en-US" sz="1450" dirty="0"/>
-          </a:p>
-        </p:txBody>
-      </p:sp>
-      <p:sp>
-        <p:nvSpPr>
-          <p:cNvPr id="11" name="Text 9"/>
-          <p:cNvSpPr/>
-          <p:nvPr/>
-        </p:nvSpPr>
-        <p:spPr>
-          <a:xfrm>
-            <a:off x="4937760" y="2606040"/>
-            <a:ext cx="2286000" cy="411480"/>
-          </a:xfrm>
-          <a:prstGeom prst="rect">
-            <a:avLst/>
-          </a:prstGeom>
-          <a:noFill/>
-          <a:ln/>
-        </p:spPr>
-        <p:txBody>
-          <a:bodyPr wrap="square" lIns="0" tIns="0" rIns="0" bIns="0" rtlCol="0" anchor="t"/>
-          <a:lstStyle/>
-          <a:p>
-            <a:pPr algn="ctr" indent="0" marL="0">
-              <a:buNone/>
-            </a:pPr>
-            <a:r>
-              <a:rPr lang="en-US" sz="1050" dirty="0">
-                <a:solidFill>
-                  <a:srgbClr val="5A6E7C"/>
-                </a:solidFill>
-                <a:latin typeface="Calibri" pitchFamily="34" charset="0"/>
-                <a:ea typeface="Calibri" pitchFamily="34" charset="-122"/>
-                <a:cs typeface="Calibri" pitchFamily="34" charset="-120"/>
-              </a:rPr>
-              <a:t>10 s windows · exceptions</a:t>
-            </a:r>
-            <a:endParaRPr lang="en-US" sz="1050" dirty="0"/>
-          </a:p>
-        </p:txBody>
-      </p:sp>
-      <p:sp>
-        <p:nvSpPr>
-          <p:cNvPr id="12" name="Shape 10"/>
-          <p:cNvSpPr/>
-          <p:nvPr/>
-        </p:nvSpPr>
-        <p:spPr>
-          <a:xfrm>
-            <a:off x="7242048" y="2514600"/>
-            <a:ext cx="1975104" cy="0"/>
-          </a:xfrm>
-          <a:prstGeom prst="line">
-            <a:avLst/>
-          </a:prstGeom>
-          <a:noFill/>
-          <a:ln w="25400">
-            <a:solidFill>
-              <a:srgbClr val="5A8FB0"/>
-            </a:solidFill>
-            <a:prstDash val="solid"/>
-            <a:headEnd type="none"/>
-            <a:tailEnd type="triangle"/>
-          </a:ln>
-        </p:spPr>
-      </p:sp>
-      <p:sp>
-        <p:nvSpPr>
-          <p:cNvPr id="13" name="Shape 11"/>
-          <p:cNvSpPr/>
-          <p:nvPr/>
-        </p:nvSpPr>
-        <p:spPr>
-          <a:xfrm>
-            <a:off x="9235440" y="1874520"/>
-            <a:ext cx="2286000" cy="1280160"/>
-          </a:xfrm>
-          <a:prstGeom prst="roundRect">
-            <a:avLst>
-              <a:gd name="adj" fmla="val 7143"/>
-            </a:avLst>
-          </a:prstGeom>
-          <a:solidFill>
-            <a:srgbClr val="EEF4F8"/>
-          </a:solidFill>
-          <a:ln w="19050">
-            <a:solidFill>
-              <a:srgbClr val="1C4A6E"/>
-            </a:solidFill>
-            <a:prstDash val="solid"/>
-          </a:ln>
-        </p:spPr>
-      </p:sp>
-      <p:sp>
-        <p:nvSpPr>
-          <p:cNvPr id="14" name="Shape 12"/>
-          <p:cNvSpPr/>
-          <p:nvPr/>
-        </p:nvSpPr>
-        <p:spPr>
-          <a:xfrm>
-            <a:off x="10287000" y="2039112"/>
-            <a:ext cx="182880" cy="182880"/>
-          </a:xfrm>
-          <a:prstGeom prst="ellipse">
-            <a:avLst/>
-          </a:prstGeom>
-          <a:solidFill>
-            <a:srgbClr val="1C4A6E"/>
-          </a:solidFill>
-          <a:ln/>
-        </p:spPr>
-      </p:sp>
-      <p:sp>
-        <p:nvSpPr>
-          <p:cNvPr id="15" name="Text 13"/>
-          <p:cNvSpPr/>
-          <p:nvPr/>
-        </p:nvSpPr>
-        <p:spPr>
-          <a:xfrm>
-            <a:off x="9208008" y="2258568"/>
-            <a:ext cx="2340864" cy="365760"/>
-          </a:xfrm>
-          <a:prstGeom prst="rect">
-            <a:avLst/>
-          </a:prstGeom>
-          <a:noFill/>
-          <a:ln/>
-        </p:spPr>
-        <p:txBody>
-          <a:bodyPr wrap="square" lIns="0" tIns="0" rIns="0" bIns="0" rtlCol="0" anchor="ctr"/>
-          <a:lstStyle/>
-          <a:p>
-            <a:pPr algn="ctr" indent="0" marL="0">
-              <a:buNone/>
-            </a:pPr>
-            <a:r>
-              <a:rPr lang="en-US" sz="1450" b="1" dirty="0">
-                <a:solidFill>
-                  <a:srgbClr val="14293A"/>
-                </a:solidFill>
-                <a:latin typeface="Calibri" pitchFamily="34" charset="0"/>
-                <a:ea typeface="Calibri" pitchFamily="34" charset="-122"/>
-                <a:cs typeface="Calibri" pitchFamily="34" charset="-120"/>
-              </a:rPr>
-              <a:t>Amazon SQS</a:t>
-            </a:r>
-            <a:endParaRPr lang="en-US" sz="1450" dirty="0"/>
-          </a:p>
-        </p:txBody>
-      </p:sp>
-      <p:sp>
-        <p:nvSpPr>
-          <p:cNvPr id="16" name="Text 14"/>
-          <p:cNvSpPr/>
-          <p:nvPr/>
-        </p:nvSpPr>
-        <p:spPr>
-          <a:xfrm>
-            <a:off x="9235440" y="2606040"/>
-            <a:ext cx="2286000" cy="411480"/>
-          </a:xfrm>
-          <a:prstGeom prst="rect">
-            <a:avLst/>
-          </a:prstGeom>
-          <a:noFill/>
-          <a:ln/>
-        </p:spPr>
-        <p:txBody>
-          <a:bodyPr wrap="square" lIns="0" tIns="0" rIns="0" bIns="0" rtlCol="0" anchor="t"/>
-          <a:lstStyle/>
-          <a:p>
-            <a:pPr algn="ctr" indent="0" marL="0">
-              <a:buNone/>
-            </a:pPr>
-            <a:r>
-              <a:rPr lang="en-US" sz="1050" dirty="0">
-                <a:solidFill>
-                  <a:srgbClr val="5A6E7C"/>
-                </a:solidFill>
-                <a:latin typeface="Calibri" pitchFamily="34" charset="0"/>
-                <a:ea typeface="Calibri" pitchFamily="34" charset="-122"/>
-                <a:cs typeface="Calibri" pitchFamily="34" charset="-120"/>
-              </a:rPr>
-              <a:t>batched ≤10 / call</a:t>
-            </a:r>
-            <a:endParaRPr lang="en-US" sz="1050" dirty="0"/>
-          </a:p>
-        </p:txBody>
-      </p:sp>
-      <p:sp>
-        <p:nvSpPr>
-          <p:cNvPr id="17" name="Shape 15"/>
-          <p:cNvSpPr/>
-          <p:nvPr/>
-        </p:nvSpPr>
-        <p:spPr>
-          <a:xfrm>
-            <a:off x="9235440" y="3520440"/>
-            <a:ext cx="2286000" cy="1280160"/>
-          </a:xfrm>
-          <a:prstGeom prst="roundRect">
-            <a:avLst>
-              <a:gd name="adj" fmla="val 7143"/>
-            </a:avLst>
-          </a:prstGeom>
-          <a:solidFill>
-            <a:srgbClr val="EEF4F8"/>
-          </a:solidFill>
-          <a:ln w="19050">
-            <a:solidFill>
-              <a:srgbClr val="1C4A6E"/>
-            </a:solidFill>
-            <a:prstDash val="solid"/>
-          </a:ln>
-        </p:spPr>
-      </p:sp>
-      <p:sp>
-        <p:nvSpPr>
-          <p:cNvPr id="18" name="Shape 16"/>
-          <p:cNvSpPr/>
-          <p:nvPr/>
-        </p:nvSpPr>
-        <p:spPr>
-          <a:xfrm>
-            <a:off x="10287000" y="3685032"/>
-            <a:ext cx="182880" cy="182880"/>
-          </a:xfrm>
-          <a:prstGeom prst="ellipse">
-            <a:avLst/>
-          </a:prstGeom>
-          <a:solidFill>
-            <a:srgbClr val="1C4A6E"/>
-          </a:solidFill>
-          <a:ln/>
-        </p:spPr>
-      </p:sp>
-      <p:sp>
-        <p:nvSpPr>
-          <p:cNvPr id="19" name="Text 17"/>
-          <p:cNvSpPr/>
-          <p:nvPr/>
-        </p:nvSpPr>
-        <p:spPr>
-          <a:xfrm>
-            <a:off x="9208008" y="3904488"/>
-            <a:ext cx="2340864" cy="365760"/>
-          </a:xfrm>
-          <a:prstGeom prst="rect">
-            <a:avLst/>
-          </a:prstGeom>
-          <a:noFill/>
-          <a:ln/>
-        </p:spPr>
-        <p:txBody>
-          <a:bodyPr wrap="square" lIns="0" tIns="0" rIns="0" bIns="0" rtlCol="0" anchor="ctr"/>
-          <a:lstStyle/>
-          <a:p>
-            <a:pPr algn="ctr" indent="0" marL="0">
-              <a:buNone/>
-            </a:pPr>
-            <a:r>
-              <a:rPr lang="en-US" sz="1450" b="1" dirty="0">
-                <a:solidFill>
-                  <a:srgbClr val="14293A"/>
-                </a:solidFill>
-                <a:latin typeface="Calibri" pitchFamily="34" charset="0"/>
-                <a:ea typeface="Calibri" pitchFamily="34" charset="-122"/>
-                <a:cs typeface="Calibri" pitchFamily="34" charset="-120"/>
-              </a:rPr>
-              <a:t>AWS Lambda</a:t>
-            </a:r>
-            <a:endParaRPr lang="en-US" sz="1450" dirty="0"/>
-          </a:p>
-        </p:txBody>
-      </p:sp>
-      <p:sp>
-        <p:nvSpPr>
-          <p:cNvPr id="20" name="Text 18"/>
-          <p:cNvSpPr/>
-          <p:nvPr/>
-        </p:nvSpPr>
-        <p:spPr>
-          <a:xfrm>
-            <a:off x="9235440" y="4251960"/>
-            <a:ext cx="2286000" cy="411480"/>
-          </a:xfrm>
-          <a:prstGeom prst="rect">
-            <a:avLst/>
-          </a:prstGeom>
-          <a:noFill/>
-          <a:ln/>
-        </p:spPr>
-        <p:txBody>
-          <a:bodyPr wrap="square" lIns="0" tIns="0" rIns="0" bIns="0" rtlCol="0" anchor="t"/>
-          <a:lstStyle/>
-          <a:p>
-            <a:pPr algn="ctr" indent="0" marL="0">
-              <a:buNone/>
-            </a:pPr>
-            <a:r>
-              <a:rPr lang="en-US" sz="1050" dirty="0">
-                <a:solidFill>
-                  <a:srgbClr val="5A6E7C"/>
-                </a:solidFill>
-                <a:latin typeface="Calibri" pitchFamily="34" charset="0"/>
-                <a:ea typeface="Calibri" pitchFamily="34" charset="-122"/>
-                <a:cs typeface="Calibri" pitchFamily="34" charset="-120"/>
-              </a:rPr>
-              <a:t>python3.12 ingest</a:t>
-            </a:r>
-            <a:endParaRPr lang="en-US" sz="1050" dirty="0"/>
-          </a:p>
-        </p:txBody>
-      </p:sp>
-      <p:sp>
-        <p:nvSpPr>
-          <p:cNvPr id="21" name="Shape 19"/>
-          <p:cNvSpPr/>
-          <p:nvPr/>
-        </p:nvSpPr>
-        <p:spPr>
-          <a:xfrm>
-            <a:off x="7242048" y="4160520"/>
-            <a:ext cx="1975104" cy="0"/>
-          </a:xfrm>
-          <a:prstGeom prst="line">
-            <a:avLst/>
-          </a:prstGeom>
-          <a:noFill/>
-          <a:ln w="25400">
-            <a:solidFill>
-              <a:srgbClr val="5A8FB0"/>
-            </a:solidFill>
-            <a:prstDash val="solid"/>
-            <a:headEnd type="triangle"/>
-            <a:tailEnd type="oval"/>
-          </a:ln>
-        </p:spPr>
-      </p:sp>
-      <p:sp>
-        <p:nvSpPr>
-          <p:cNvPr id="22" name="Shape 20"/>
-          <p:cNvSpPr/>
-          <p:nvPr/>
-        </p:nvSpPr>
-        <p:spPr>
-          <a:xfrm>
-            <a:off x="4937760" y="3520440"/>
-            <a:ext cx="2286000" cy="1280160"/>
-          </a:xfrm>
-          <a:prstGeom prst="roundRect">
-            <a:avLst>
-              <a:gd name="adj" fmla="val 7143"/>
-            </a:avLst>
-          </a:prstGeom>
-          <a:solidFill>
-            <a:srgbClr val="EEF4F8"/>
-          </a:solidFill>
-          <a:ln w="19050">
-            <a:solidFill>
-              <a:srgbClr val="1C4A6E"/>
-            </a:solidFill>
-            <a:prstDash val="solid"/>
-          </a:ln>
-        </p:spPr>
-      </p:sp>
-      <p:sp>
-        <p:nvSpPr>
-          <p:cNvPr id="23" name="Shape 21"/>
-          <p:cNvSpPr/>
-          <p:nvPr/>
-        </p:nvSpPr>
-        <p:spPr>
-          <a:xfrm>
-            <a:off x="5989320" y="3685032"/>
-            <a:ext cx="182880" cy="182880"/>
-          </a:xfrm>
-          <a:prstGeom prst="ellipse">
-            <a:avLst/>
-          </a:prstGeom>
-          <a:solidFill>
-            <a:srgbClr val="1C4A6E"/>
-          </a:solidFill>
-          <a:ln/>
-        </p:spPr>
-      </p:sp>
-      <p:sp>
-        <p:nvSpPr>
-          <p:cNvPr id="24" name="Text 22"/>
-          <p:cNvSpPr/>
-          <p:nvPr/>
-        </p:nvSpPr>
-        <p:spPr>
-          <a:xfrm>
-            <a:off x="4910328" y="3904488"/>
-            <a:ext cx="2340864" cy="365760"/>
-          </a:xfrm>
-          <a:prstGeom prst="rect">
-            <a:avLst/>
-          </a:prstGeom>
-          <a:noFill/>
-          <a:ln/>
-        </p:spPr>
-        <p:txBody>
-          <a:bodyPr wrap="square" lIns="0" tIns="0" rIns="0" bIns="0" rtlCol="0" anchor="ctr"/>
-          <a:lstStyle/>
-          <a:p>
-            <a:pPr algn="ctr" indent="0" marL="0">
-              <a:buNone/>
-            </a:pPr>
-            <a:r>
-              <a:rPr lang="en-US" sz="1450" b="1" dirty="0">
-                <a:solidFill>
-                  <a:srgbClr val="14293A"/>
-                </a:solidFill>
-                <a:latin typeface="Calibri" pitchFamily="34" charset="0"/>
-                <a:ea typeface="Calibri" pitchFamily="34" charset="-122"/>
-                <a:cs typeface="Calibri" pitchFamily="34" charset="-120"/>
-              </a:rPr>
-              <a:t>DynamoDB</a:t>
-            </a:r>
-            <a:endParaRPr lang="en-US" sz="1450" dirty="0"/>
-          </a:p>
-        </p:txBody>
-      </p:sp>
-      <p:sp>
-        <p:nvSpPr>
-          <p:cNvPr id="25" name="Text 23"/>
-          <p:cNvSpPr/>
-          <p:nvPr/>
-        </p:nvSpPr>
-        <p:spPr>
-          <a:xfrm>
-            <a:off x="4937760" y="4251960"/>
-            <a:ext cx="2286000" cy="411480"/>
-          </a:xfrm>
-          <a:prstGeom prst="rect">
-            <a:avLst/>
-          </a:prstGeom>
-          <a:noFill/>
-          <a:ln/>
-        </p:spPr>
-        <p:txBody>
-          <a:bodyPr wrap="square" lIns="0" tIns="0" rIns="0" bIns="0" rtlCol="0" anchor="t"/>
-          <a:lstStyle/>
-          <a:p>
-            <a:pPr algn="ctr" indent="0" marL="0">
-              <a:buNone/>
-            </a:pPr>
-            <a:r>
-              <a:rPr lang="en-US" sz="1050" dirty="0">
-                <a:solidFill>
-                  <a:srgbClr val="5A6E7C"/>
-                </a:solidFill>
-                <a:latin typeface="Calibri" pitchFamily="34" charset="0"/>
-                <a:ea typeface="Calibri" pitchFamily="34" charset="-122"/>
-                <a:cs typeface="Calibri" pitchFamily="34" charset="-120"/>
-              </a:rPr>
-              <a:t>window archive</a:t>
-            </a:r>
-            <a:endParaRPr lang="en-US" sz="1050" dirty="0"/>
-          </a:p>
-        </p:txBody>
-      </p:sp>
-      <p:sp>
-        <p:nvSpPr>
-          <p:cNvPr id="26" name="Shape 24"/>
-          <p:cNvSpPr/>
-          <p:nvPr/>
-        </p:nvSpPr>
-        <p:spPr>
-          <a:xfrm>
-            <a:off x="2944368" y="4160520"/>
-            <a:ext cx="1975104" cy="0"/>
-          </a:xfrm>
-          <a:prstGeom prst="line">
-            <a:avLst/>
-          </a:prstGeom>
-          <a:noFill/>
-          <a:ln w="25400">
-            <a:solidFill>
-              <a:srgbClr val="5A8FB0"/>
-            </a:solidFill>
-            <a:prstDash val="solid"/>
-            <a:headEnd type="triangle"/>
-            <a:tailEnd type="oval"/>
-          </a:ln>
-        </p:spPr>
-      </p:sp>
-      <p:sp>
-        <p:nvSpPr>
-          <p:cNvPr id="27" name="Shape 25"/>
-          <p:cNvSpPr/>
-          <p:nvPr/>
-        </p:nvSpPr>
-        <p:spPr>
-          <a:xfrm>
-            <a:off x="640080" y="3520440"/>
-            <a:ext cx="2286000" cy="1280160"/>
-          </a:xfrm>
-          <a:prstGeom prst="roundRect">
-            <a:avLst>
-              <a:gd name="adj" fmla="val 7143"/>
-            </a:avLst>
-          </a:prstGeom>
-          <a:solidFill>
-            <a:srgbClr val="EEF4F8"/>
-          </a:solidFill>
-          <a:ln w="19050">
-            <a:solidFill>
-              <a:srgbClr val="2E6C93"/>
-            </a:solidFill>
-            <a:prstDash val="solid"/>
-          </a:ln>
-        </p:spPr>
-      </p:sp>
-      <p:sp>
-        <p:nvSpPr>
-          <p:cNvPr id="28" name="Shape 26"/>
-          <p:cNvSpPr/>
-          <p:nvPr/>
-        </p:nvSpPr>
-        <p:spPr>
-          <a:xfrm>
-            <a:off x="1691640" y="3685032"/>
-            <a:ext cx="182880" cy="182880"/>
-          </a:xfrm>
-          <a:prstGeom prst="ellipse">
-            <a:avLst/>
-          </a:prstGeom>
-          <a:solidFill>
-            <a:srgbClr val="2E6C93"/>
-          </a:solidFill>
-          <a:ln/>
-        </p:spPr>
-      </p:sp>
-      <p:sp>
-        <p:nvSpPr>
-          <p:cNvPr id="29" name="Text 27"/>
-          <p:cNvSpPr/>
-          <p:nvPr/>
-        </p:nvSpPr>
-        <p:spPr>
-          <a:xfrm>
-            <a:off x="612648" y="3904488"/>
-            <a:ext cx="2340864" cy="365760"/>
-          </a:xfrm>
-          <a:prstGeom prst="rect">
-            <a:avLst/>
-          </a:prstGeom>
-          <a:noFill/>
-          <a:ln/>
-        </p:spPr>
-        <p:txBody>
-          <a:bodyPr wrap="square" lIns="0" tIns="0" rIns="0" bIns="0" rtlCol="0" anchor="ctr"/>
-          <a:lstStyle/>
-          <a:p>
-            <a:pPr algn="ctr" indent="0" marL="0">
-              <a:buNone/>
-            </a:pPr>
-            <a:r>
-              <a:rPr lang="en-US" sz="1450" b="1" dirty="0">
-                <a:solidFill>
-                  <a:srgbClr val="14293A"/>
-                </a:solidFill>
-                <a:latin typeface="Calibri" pitchFamily="34" charset="0"/>
-                <a:ea typeface="Calibri" pitchFamily="34" charset="-122"/>
-                <a:cs typeface="Calibri" pitchFamily="34" charset="-120"/>
-              </a:rPr>
-              <a:t>API GW + S3</a:t>
-            </a:r>
-            <a:endParaRPr lang="en-US" sz="1450" dirty="0"/>
-          </a:p>
-        </p:txBody>
-      </p:sp>
-      <p:sp>
-        <p:nvSpPr>
-          <p:cNvPr id="30" name="Text 28"/>
-          <p:cNvSpPr/>
-          <p:nvPr/>
-        </p:nvSpPr>
-        <p:spPr>
-          <a:xfrm>
-            <a:off x="640080" y="4251960"/>
-            <a:ext cx="2286000" cy="411480"/>
-          </a:xfrm>
-          <a:prstGeom prst="rect">
-            <a:avLst/>
-          </a:prstGeom>
-          <a:noFill/>
-          <a:ln/>
-        </p:spPr>
-        <p:txBody>
-          <a:bodyPr wrap="square" lIns="0" tIns="0" rIns="0" bIns="0" rtlCol="0" anchor="t"/>
-          <a:lstStyle/>
-          <a:p>
-            <a:pPr algn="ctr" indent="0" marL="0">
-              <a:buNone/>
-            </a:pPr>
-            <a:r>
-              <a:rPr lang="en-US" sz="1050" dirty="0">
-                <a:solidFill>
-                  <a:srgbClr val="5A6E7C"/>
-                </a:solidFill>
-                <a:latin typeface="Calibri" pitchFamily="34" charset="0"/>
-                <a:ea typeface="Calibri" pitchFamily="34" charset="-122"/>
-                <a:cs typeface="Calibri" pitchFamily="34" charset="-120"/>
-              </a:rPr>
-              <a:t>live manifest</a:t>
-            </a:r>
-            <a:endParaRPr lang="en-US" sz="1050" dirty="0"/>
-          </a:p>
-        </p:txBody>
-      </p:sp>
-      <p:sp>
-        <p:nvSpPr>
-          <p:cNvPr id="31" name="Shape 29"/>
-          <p:cNvSpPr/>
-          <p:nvPr/>
-        </p:nvSpPr>
-        <p:spPr>
-          <a:xfrm>
-            <a:off x="10378440" y="3154680"/>
-            <a:ext cx="0" cy="365760"/>
+            <a:off x="2231136" y="3154680"/>
+            <a:ext cx="258409" cy="0"/>
           </a:xfrm>
           <a:prstGeom prst="line">
             <a:avLst/>
@@ -2485,7 +1760,806 @@
       </p:sp>
       <p:sp>
         <p:nvSpPr>
+          <p:cNvPr id="8" name="Shape 6"/>
+          <p:cNvSpPr/>
+          <p:nvPr/>
+        </p:nvSpPr>
+        <p:spPr>
+          <a:xfrm>
+            <a:off x="2507833" y="2468880"/>
+            <a:ext cx="1572768" cy="1371600"/>
+          </a:xfrm>
+          <a:prstGeom prst="roundRect">
+            <a:avLst>
+              <a:gd name="adj" fmla="val 6667"/>
+            </a:avLst>
+          </a:prstGeom>
+          <a:solidFill>
+            <a:srgbClr val="EEF4F8"/>
+          </a:solidFill>
+          <a:ln w="19050">
+            <a:solidFill>
+              <a:srgbClr val="5A8FB0"/>
+            </a:solidFill>
+            <a:prstDash val="solid"/>
+          </a:ln>
+        </p:spPr>
+      </p:sp>
+      <p:sp>
+        <p:nvSpPr>
+          <p:cNvPr id="9" name="Shape 7"/>
+          <p:cNvSpPr/>
+          <p:nvPr/>
+        </p:nvSpPr>
+        <p:spPr>
+          <a:xfrm>
+            <a:off x="3202777" y="2633472"/>
+            <a:ext cx="182880" cy="182880"/>
+          </a:xfrm>
+          <a:prstGeom prst="ellipse">
+            <a:avLst/>
+          </a:prstGeom>
+          <a:solidFill>
+            <a:srgbClr val="5A8FB0"/>
+          </a:solidFill>
+          <a:ln/>
+        </p:spPr>
+      </p:sp>
+      <p:sp>
+        <p:nvSpPr>
+          <p:cNvPr id="10" name="Text 8"/>
+          <p:cNvSpPr/>
+          <p:nvPr/>
+        </p:nvSpPr>
+        <p:spPr>
+          <a:xfrm>
+            <a:off x="2480401" y="2852928"/>
+            <a:ext cx="1627632" cy="365760"/>
+          </a:xfrm>
+          <a:prstGeom prst="rect">
+            <a:avLst/>
+          </a:prstGeom>
+          <a:noFill/>
+          <a:ln/>
+        </p:spPr>
+        <p:txBody>
+          <a:bodyPr wrap="square" lIns="0" tIns="0" rIns="0" bIns="0" rtlCol="0" anchor="ctr"/>
+          <a:lstStyle/>
+          <a:p>
+            <a:pPr algn="ctr" indent="0" marL="0">
+              <a:buNone/>
+            </a:pPr>
+            <a:r>
+              <a:rPr lang="en-US" sz="1450" b="1" dirty="0">
+                <a:solidFill>
+                  <a:srgbClr val="14293A"/>
+                </a:solidFill>
+                <a:latin typeface="Calibri" pitchFamily="34" charset="0"/>
+                <a:ea typeface="Calibri" pitchFamily="34" charset="-122"/>
+                <a:cs typeface="Calibri" pitchFamily="34" charset="-120"/>
+              </a:rPr>
+              <a:t>Depot relay</a:t>
+            </a:r>
+            <a:endParaRPr lang="en-US" sz="1450" dirty="0"/>
+          </a:p>
+        </p:txBody>
+      </p:sp>
+      <p:sp>
+        <p:nvSpPr>
+          <p:cNvPr id="11" name="Text 9"/>
+          <p:cNvSpPr/>
+          <p:nvPr/>
+        </p:nvSpPr>
+        <p:spPr>
+          <a:xfrm>
+            <a:off x="2507833" y="3200400"/>
+            <a:ext cx="1572768" cy="411480"/>
+          </a:xfrm>
+          <a:prstGeom prst="rect">
+            <a:avLst/>
+          </a:prstGeom>
+          <a:noFill/>
+          <a:ln/>
+        </p:spPr>
+        <p:txBody>
+          <a:bodyPr wrap="square" lIns="0" tIns="0" rIns="0" bIns="0" rtlCol="0" anchor="t"/>
+          <a:lstStyle/>
+          <a:p>
+            <a:pPr algn="ctr" indent="0" marL="0">
+              <a:buNone/>
+            </a:pPr>
+            <a:r>
+              <a:rPr lang="en-US" sz="1050" dirty="0">
+                <a:solidFill>
+                  <a:srgbClr val="5A6E7C"/>
+                </a:solidFill>
+                <a:latin typeface="Calibri" pitchFamily="34" charset="0"/>
+                <a:ea typeface="Calibri" pitchFamily="34" charset="-122"/>
+                <a:cs typeface="Calibri" pitchFamily="34" charset="-120"/>
+              </a:rPr>
+              <a:t>10 s windows · exceptions</a:t>
+            </a:r>
+            <a:endParaRPr lang="en-US" sz="1050" dirty="0"/>
+          </a:p>
+        </p:txBody>
+      </p:sp>
+      <p:sp>
+        <p:nvSpPr>
+          <p:cNvPr id="12" name="Shape 10"/>
+          <p:cNvSpPr/>
+          <p:nvPr/>
+        </p:nvSpPr>
+        <p:spPr>
+          <a:xfrm>
+            <a:off x="4098889" y="3154680"/>
+            <a:ext cx="258409" cy="0"/>
+          </a:xfrm>
+          <a:prstGeom prst="line">
+            <a:avLst/>
+          </a:prstGeom>
+          <a:noFill/>
+          <a:ln w="25400">
+            <a:solidFill>
+              <a:srgbClr val="5A8FB0"/>
+            </a:solidFill>
+            <a:prstDash val="solid"/>
+            <a:tailEnd type="triangle"/>
+          </a:ln>
+        </p:spPr>
+      </p:sp>
+      <p:sp>
+        <p:nvSpPr>
+          <p:cNvPr id="13" name="Shape 11"/>
+          <p:cNvSpPr/>
+          <p:nvPr/>
+        </p:nvSpPr>
+        <p:spPr>
+          <a:xfrm>
+            <a:off x="4375587" y="2468880"/>
+            <a:ext cx="1572768" cy="1371600"/>
+          </a:xfrm>
+          <a:prstGeom prst="roundRect">
+            <a:avLst>
+              <a:gd name="adj" fmla="val 6667"/>
+            </a:avLst>
+          </a:prstGeom>
+          <a:solidFill>
+            <a:srgbClr val="EEF4F8"/>
+          </a:solidFill>
+          <a:ln w="19050">
+            <a:solidFill>
+              <a:srgbClr val="1C4A6E"/>
+            </a:solidFill>
+            <a:prstDash val="solid"/>
+          </a:ln>
+        </p:spPr>
+      </p:sp>
+      <p:sp>
+        <p:nvSpPr>
+          <p:cNvPr id="14" name="Shape 12"/>
+          <p:cNvSpPr/>
+          <p:nvPr/>
+        </p:nvSpPr>
+        <p:spPr>
+          <a:xfrm>
+            <a:off x="5070531" y="2633472"/>
+            <a:ext cx="182880" cy="182880"/>
+          </a:xfrm>
+          <a:prstGeom prst="ellipse">
+            <a:avLst/>
+          </a:prstGeom>
+          <a:solidFill>
+            <a:srgbClr val="1C4A6E"/>
+          </a:solidFill>
+          <a:ln/>
+        </p:spPr>
+      </p:sp>
+      <p:sp>
+        <p:nvSpPr>
+          <p:cNvPr id="15" name="Text 13"/>
+          <p:cNvSpPr/>
+          <p:nvPr/>
+        </p:nvSpPr>
+        <p:spPr>
+          <a:xfrm>
+            <a:off x="4348155" y="2852928"/>
+            <a:ext cx="1627632" cy="365760"/>
+          </a:xfrm>
+          <a:prstGeom prst="rect">
+            <a:avLst/>
+          </a:prstGeom>
+          <a:noFill/>
+          <a:ln/>
+        </p:spPr>
+        <p:txBody>
+          <a:bodyPr wrap="square" lIns="0" tIns="0" rIns="0" bIns="0" rtlCol="0" anchor="ctr"/>
+          <a:lstStyle/>
+          <a:p>
+            <a:pPr algn="ctr" indent="0" marL="0">
+              <a:buNone/>
+            </a:pPr>
+            <a:r>
+              <a:rPr lang="en-US" sz="1450" b="1" dirty="0">
+                <a:solidFill>
+                  <a:srgbClr val="14293A"/>
+                </a:solidFill>
+                <a:latin typeface="Calibri" pitchFamily="34" charset="0"/>
+                <a:ea typeface="Calibri" pitchFamily="34" charset="-122"/>
+                <a:cs typeface="Calibri" pitchFamily="34" charset="-120"/>
+              </a:rPr>
+              <a:t>Amazon SQS</a:t>
+            </a:r>
+            <a:endParaRPr lang="en-US" sz="1450" dirty="0"/>
+          </a:p>
+        </p:txBody>
+      </p:sp>
+      <p:sp>
+        <p:nvSpPr>
+          <p:cNvPr id="16" name="Text 14"/>
+          <p:cNvSpPr/>
+          <p:nvPr/>
+        </p:nvSpPr>
+        <p:spPr>
+          <a:xfrm>
+            <a:off x="4375587" y="3200400"/>
+            <a:ext cx="1572768" cy="411480"/>
+          </a:xfrm>
+          <a:prstGeom prst="rect">
+            <a:avLst/>
+          </a:prstGeom>
+          <a:noFill/>
+          <a:ln/>
+        </p:spPr>
+        <p:txBody>
+          <a:bodyPr wrap="square" lIns="0" tIns="0" rIns="0" bIns="0" rtlCol="0" anchor="t"/>
+          <a:lstStyle/>
+          <a:p>
+            <a:pPr algn="ctr" indent="0" marL="0">
+              <a:buNone/>
+            </a:pPr>
+            <a:r>
+              <a:rPr lang="en-US" sz="1050" dirty="0">
+                <a:solidFill>
+                  <a:srgbClr val="5A6E7C"/>
+                </a:solidFill>
+                <a:latin typeface="Calibri" pitchFamily="34" charset="0"/>
+                <a:ea typeface="Calibri" pitchFamily="34" charset="-122"/>
+                <a:cs typeface="Calibri" pitchFamily="34" charset="-120"/>
+              </a:rPr>
+              <a:t>batched ≤10 / call</a:t>
+            </a:r>
+            <a:endParaRPr lang="en-US" sz="1050" dirty="0"/>
+          </a:p>
+        </p:txBody>
+      </p:sp>
+      <p:sp>
+        <p:nvSpPr>
+          <p:cNvPr id="17" name="Shape 15"/>
+          <p:cNvSpPr/>
+          <p:nvPr/>
+        </p:nvSpPr>
+        <p:spPr>
+          <a:xfrm>
+            <a:off x="5966643" y="3154680"/>
+            <a:ext cx="258409" cy="0"/>
+          </a:xfrm>
+          <a:prstGeom prst="line">
+            <a:avLst/>
+          </a:prstGeom>
+          <a:noFill/>
+          <a:ln w="25400">
+            <a:solidFill>
+              <a:srgbClr val="5A8FB0"/>
+            </a:solidFill>
+            <a:prstDash val="solid"/>
+            <a:tailEnd type="triangle"/>
+          </a:ln>
+        </p:spPr>
+      </p:sp>
+      <p:sp>
+        <p:nvSpPr>
+          <p:cNvPr id="18" name="Shape 16"/>
+          <p:cNvSpPr/>
+          <p:nvPr/>
+        </p:nvSpPr>
+        <p:spPr>
+          <a:xfrm>
+            <a:off x="6243340" y="2468880"/>
+            <a:ext cx="1572768" cy="1371600"/>
+          </a:xfrm>
+          <a:prstGeom prst="roundRect">
+            <a:avLst>
+              <a:gd name="adj" fmla="val 6667"/>
+            </a:avLst>
+          </a:prstGeom>
+          <a:solidFill>
+            <a:srgbClr val="EEF4F8"/>
+          </a:solidFill>
+          <a:ln w="19050">
+            <a:solidFill>
+              <a:srgbClr val="1C4A6E"/>
+            </a:solidFill>
+            <a:prstDash val="solid"/>
+          </a:ln>
+        </p:spPr>
+      </p:sp>
+      <p:sp>
+        <p:nvSpPr>
+          <p:cNvPr id="19" name="Shape 17"/>
+          <p:cNvSpPr/>
+          <p:nvPr/>
+        </p:nvSpPr>
+        <p:spPr>
+          <a:xfrm>
+            <a:off x="6938284" y="2633472"/>
+            <a:ext cx="182880" cy="182880"/>
+          </a:xfrm>
+          <a:prstGeom prst="ellipse">
+            <a:avLst/>
+          </a:prstGeom>
+          <a:solidFill>
+            <a:srgbClr val="1C4A6E"/>
+          </a:solidFill>
+          <a:ln/>
+        </p:spPr>
+      </p:sp>
+      <p:sp>
+        <p:nvSpPr>
+          <p:cNvPr id="20" name="Text 18"/>
+          <p:cNvSpPr/>
+          <p:nvPr/>
+        </p:nvSpPr>
+        <p:spPr>
+          <a:xfrm>
+            <a:off x="6215908" y="2852928"/>
+            <a:ext cx="1627632" cy="365760"/>
+          </a:xfrm>
+          <a:prstGeom prst="rect">
+            <a:avLst/>
+          </a:prstGeom>
+          <a:noFill/>
+          <a:ln/>
+        </p:spPr>
+        <p:txBody>
+          <a:bodyPr wrap="square" lIns="0" tIns="0" rIns="0" bIns="0" rtlCol="0" anchor="ctr"/>
+          <a:lstStyle/>
+          <a:p>
+            <a:pPr algn="ctr" indent="0" marL="0">
+              <a:buNone/>
+            </a:pPr>
+            <a:r>
+              <a:rPr lang="en-US" sz="1450" b="1" dirty="0">
+                <a:solidFill>
+                  <a:srgbClr val="14293A"/>
+                </a:solidFill>
+                <a:latin typeface="Calibri" pitchFamily="34" charset="0"/>
+                <a:ea typeface="Calibri" pitchFamily="34" charset="-122"/>
+                <a:cs typeface="Calibri" pitchFamily="34" charset="-120"/>
+              </a:rPr>
+              <a:t>AWS Lambda</a:t>
+            </a:r>
+            <a:endParaRPr lang="en-US" sz="1450" dirty="0"/>
+          </a:p>
+        </p:txBody>
+      </p:sp>
+      <p:sp>
+        <p:nvSpPr>
+          <p:cNvPr id="21" name="Text 19"/>
+          <p:cNvSpPr/>
+          <p:nvPr/>
+        </p:nvSpPr>
+        <p:spPr>
+          <a:xfrm>
+            <a:off x="6243340" y="3200400"/>
+            <a:ext cx="1572768" cy="411480"/>
+          </a:xfrm>
+          <a:prstGeom prst="rect">
+            <a:avLst/>
+          </a:prstGeom>
+          <a:noFill/>
+          <a:ln/>
+        </p:spPr>
+        <p:txBody>
+          <a:bodyPr wrap="square" lIns="0" tIns="0" rIns="0" bIns="0" rtlCol="0" anchor="t"/>
+          <a:lstStyle/>
+          <a:p>
+            <a:pPr algn="ctr" indent="0" marL="0">
+              <a:buNone/>
+            </a:pPr>
+            <a:r>
+              <a:rPr lang="en-US" sz="1050" dirty="0">
+                <a:solidFill>
+                  <a:srgbClr val="5A6E7C"/>
+                </a:solidFill>
+                <a:latin typeface="Calibri" pitchFamily="34" charset="0"/>
+                <a:ea typeface="Calibri" pitchFamily="34" charset="-122"/>
+                <a:cs typeface="Calibri" pitchFamily="34" charset="-120"/>
+              </a:rPr>
+              <a:t>python3.12 ingest</a:t>
+            </a:r>
+            <a:endParaRPr lang="en-US" sz="1050" dirty="0"/>
+          </a:p>
+        </p:txBody>
+      </p:sp>
+      <p:sp>
+        <p:nvSpPr>
+          <p:cNvPr id="22" name="Shape 20"/>
+          <p:cNvSpPr/>
+          <p:nvPr/>
+        </p:nvSpPr>
+        <p:spPr>
+          <a:xfrm>
+            <a:off x="7834396" y="3154680"/>
+            <a:ext cx="258409" cy="0"/>
+          </a:xfrm>
+          <a:prstGeom prst="line">
+            <a:avLst/>
+          </a:prstGeom>
+          <a:noFill/>
+          <a:ln w="25400">
+            <a:solidFill>
+              <a:srgbClr val="5A8FB0"/>
+            </a:solidFill>
+            <a:prstDash val="solid"/>
+            <a:tailEnd type="triangle"/>
+          </a:ln>
+        </p:spPr>
+      </p:sp>
+      <p:sp>
+        <p:nvSpPr>
+          <p:cNvPr id="23" name="Shape 21"/>
+          <p:cNvSpPr/>
+          <p:nvPr/>
+        </p:nvSpPr>
+        <p:spPr>
+          <a:xfrm>
+            <a:off x="8111094" y="2468880"/>
+            <a:ext cx="1572768" cy="1371600"/>
+          </a:xfrm>
+          <a:prstGeom prst="roundRect">
+            <a:avLst>
+              <a:gd name="adj" fmla="val 6667"/>
+            </a:avLst>
+          </a:prstGeom>
+          <a:solidFill>
+            <a:srgbClr val="EEF4F8"/>
+          </a:solidFill>
+          <a:ln w="19050">
+            <a:solidFill>
+              <a:srgbClr val="1C4A6E"/>
+            </a:solidFill>
+            <a:prstDash val="solid"/>
+          </a:ln>
+        </p:spPr>
+      </p:sp>
+      <p:sp>
+        <p:nvSpPr>
+          <p:cNvPr id="24" name="Shape 22"/>
+          <p:cNvSpPr/>
+          <p:nvPr/>
+        </p:nvSpPr>
+        <p:spPr>
+          <a:xfrm>
+            <a:off x="8806038" y="2633472"/>
+            <a:ext cx="182880" cy="182880"/>
+          </a:xfrm>
+          <a:prstGeom prst="ellipse">
+            <a:avLst/>
+          </a:prstGeom>
+          <a:solidFill>
+            <a:srgbClr val="1C4A6E"/>
+          </a:solidFill>
+          <a:ln/>
+        </p:spPr>
+      </p:sp>
+      <p:sp>
+        <p:nvSpPr>
+          <p:cNvPr id="25" name="Text 23"/>
+          <p:cNvSpPr/>
+          <p:nvPr/>
+        </p:nvSpPr>
+        <p:spPr>
+          <a:xfrm>
+            <a:off x="8083662" y="2852928"/>
+            <a:ext cx="1627632" cy="365760"/>
+          </a:xfrm>
+          <a:prstGeom prst="rect">
+            <a:avLst/>
+          </a:prstGeom>
+          <a:noFill/>
+          <a:ln/>
+        </p:spPr>
+        <p:txBody>
+          <a:bodyPr wrap="square" lIns="0" tIns="0" rIns="0" bIns="0" rtlCol="0" anchor="ctr"/>
+          <a:lstStyle/>
+          <a:p>
+            <a:pPr algn="ctr" indent="0" marL="0">
+              <a:buNone/>
+            </a:pPr>
+            <a:r>
+              <a:rPr lang="en-US" sz="1450" b="1" dirty="0">
+                <a:solidFill>
+                  <a:srgbClr val="14293A"/>
+                </a:solidFill>
+                <a:latin typeface="Calibri" pitchFamily="34" charset="0"/>
+                <a:ea typeface="Calibri" pitchFamily="34" charset="-122"/>
+                <a:cs typeface="Calibri" pitchFamily="34" charset="-120"/>
+              </a:rPr>
+              <a:t>DynamoDB</a:t>
+            </a:r>
+            <a:endParaRPr lang="en-US" sz="1450" dirty="0"/>
+          </a:p>
+        </p:txBody>
+      </p:sp>
+      <p:sp>
+        <p:nvSpPr>
+          <p:cNvPr id="26" name="Text 24"/>
+          <p:cNvSpPr/>
+          <p:nvPr/>
+        </p:nvSpPr>
+        <p:spPr>
+          <a:xfrm>
+            <a:off x="8111094" y="3200400"/>
+            <a:ext cx="1572768" cy="411480"/>
+          </a:xfrm>
+          <a:prstGeom prst="rect">
+            <a:avLst/>
+          </a:prstGeom>
+          <a:noFill/>
+          <a:ln/>
+        </p:spPr>
+        <p:txBody>
+          <a:bodyPr wrap="square" lIns="0" tIns="0" rIns="0" bIns="0" rtlCol="0" anchor="t"/>
+          <a:lstStyle/>
+          <a:p>
+            <a:pPr algn="ctr" indent="0" marL="0">
+              <a:buNone/>
+            </a:pPr>
+            <a:r>
+              <a:rPr lang="en-US" sz="1050" dirty="0">
+                <a:solidFill>
+                  <a:srgbClr val="5A6E7C"/>
+                </a:solidFill>
+                <a:latin typeface="Calibri" pitchFamily="34" charset="0"/>
+                <a:ea typeface="Calibri" pitchFamily="34" charset="-122"/>
+                <a:cs typeface="Calibri" pitchFamily="34" charset="-120"/>
+              </a:rPr>
+              <a:t>window archive</a:t>
+            </a:r>
+            <a:endParaRPr lang="en-US" sz="1050" dirty="0"/>
+          </a:p>
+        </p:txBody>
+      </p:sp>
+      <p:sp>
+        <p:nvSpPr>
+          <p:cNvPr id="27" name="Shape 25"/>
+          <p:cNvSpPr/>
+          <p:nvPr/>
+        </p:nvSpPr>
+        <p:spPr>
+          <a:xfrm>
+            <a:off x="9702150" y="3154680"/>
+            <a:ext cx="258409" cy="0"/>
+          </a:xfrm>
+          <a:prstGeom prst="line">
+            <a:avLst/>
+          </a:prstGeom>
+          <a:noFill/>
+          <a:ln w="25400">
+            <a:solidFill>
+              <a:srgbClr val="5A8FB0"/>
+            </a:solidFill>
+            <a:prstDash val="solid"/>
+            <a:tailEnd type="triangle"/>
+          </a:ln>
+        </p:spPr>
+      </p:sp>
+      <p:sp>
+        <p:nvSpPr>
+          <p:cNvPr id="28" name="Shape 26"/>
+          <p:cNvSpPr/>
+          <p:nvPr/>
+        </p:nvSpPr>
+        <p:spPr>
+          <a:xfrm>
+            <a:off x="9978847" y="2468880"/>
+            <a:ext cx="1572768" cy="1371600"/>
+          </a:xfrm>
+          <a:prstGeom prst="roundRect">
+            <a:avLst>
+              <a:gd name="adj" fmla="val 6667"/>
+            </a:avLst>
+          </a:prstGeom>
+          <a:solidFill>
+            <a:srgbClr val="EEF4F8"/>
+          </a:solidFill>
+          <a:ln w="19050">
+            <a:solidFill>
+              <a:srgbClr val="2E6C93"/>
+            </a:solidFill>
+            <a:prstDash val="solid"/>
+          </a:ln>
+        </p:spPr>
+      </p:sp>
+      <p:sp>
+        <p:nvSpPr>
+          <p:cNvPr id="29" name="Shape 27"/>
+          <p:cNvSpPr/>
+          <p:nvPr/>
+        </p:nvSpPr>
+        <p:spPr>
+          <a:xfrm>
+            <a:off x="10673791" y="2633472"/>
+            <a:ext cx="182880" cy="182880"/>
+          </a:xfrm>
+          <a:prstGeom prst="ellipse">
+            <a:avLst/>
+          </a:prstGeom>
+          <a:solidFill>
+            <a:srgbClr val="2E6C93"/>
+          </a:solidFill>
+          <a:ln/>
+        </p:spPr>
+      </p:sp>
+      <p:sp>
+        <p:nvSpPr>
+          <p:cNvPr id="30" name="Text 28"/>
+          <p:cNvSpPr/>
+          <p:nvPr/>
+        </p:nvSpPr>
+        <p:spPr>
+          <a:xfrm>
+            <a:off x="9951415" y="2852928"/>
+            <a:ext cx="1627632" cy="365760"/>
+          </a:xfrm>
+          <a:prstGeom prst="rect">
+            <a:avLst/>
+          </a:prstGeom>
+          <a:noFill/>
+          <a:ln/>
+        </p:spPr>
+        <p:txBody>
+          <a:bodyPr wrap="square" lIns="0" tIns="0" rIns="0" bIns="0" rtlCol="0" anchor="ctr"/>
+          <a:lstStyle/>
+          <a:p>
+            <a:pPr algn="ctr" indent="0" marL="0">
+              <a:buNone/>
+            </a:pPr>
+            <a:r>
+              <a:rPr lang="en-US" sz="1450" b="1" dirty="0">
+                <a:solidFill>
+                  <a:srgbClr val="14293A"/>
+                </a:solidFill>
+                <a:latin typeface="Calibri" pitchFamily="34" charset="0"/>
+                <a:ea typeface="Calibri" pitchFamily="34" charset="-122"/>
+                <a:cs typeface="Calibri" pitchFamily="34" charset="-120"/>
+              </a:rPr>
+              <a:t>API GW + S3</a:t>
+            </a:r>
+            <a:endParaRPr lang="en-US" sz="1450" dirty="0"/>
+          </a:p>
+        </p:txBody>
+      </p:sp>
+      <p:sp>
+        <p:nvSpPr>
+          <p:cNvPr id="31" name="Text 29"/>
+          <p:cNvSpPr/>
+          <p:nvPr/>
+        </p:nvSpPr>
+        <p:spPr>
+          <a:xfrm>
+            <a:off x="9978847" y="3200400"/>
+            <a:ext cx="1572768" cy="411480"/>
+          </a:xfrm>
+          <a:prstGeom prst="rect">
+            <a:avLst/>
+          </a:prstGeom>
+          <a:noFill/>
+          <a:ln/>
+        </p:spPr>
+        <p:txBody>
+          <a:bodyPr wrap="square" lIns="0" tIns="0" rIns="0" bIns="0" rtlCol="0" anchor="t"/>
+          <a:lstStyle/>
+          <a:p>
+            <a:pPr algn="ctr" indent="0" marL="0">
+              <a:buNone/>
+            </a:pPr>
+            <a:r>
+              <a:rPr lang="en-US" sz="1050" dirty="0">
+                <a:solidFill>
+                  <a:srgbClr val="5A6E7C"/>
+                </a:solidFill>
+                <a:latin typeface="Calibri" pitchFamily="34" charset="0"/>
+                <a:ea typeface="Calibri" pitchFamily="34" charset="-122"/>
+                <a:cs typeface="Calibri" pitchFamily="34" charset="-120"/>
+              </a:rPr>
+              <a:t>live manifest</a:t>
+            </a:r>
+            <a:endParaRPr lang="en-US" sz="1050" dirty="0"/>
+          </a:p>
+        </p:txBody>
+      </p:sp>
+      <p:sp>
+        <p:nvSpPr>
           <p:cNvPr id="32" name="Text 30"/>
+          <p:cNvSpPr/>
+          <p:nvPr/>
+        </p:nvSpPr>
+        <p:spPr>
+          <a:xfrm>
+            <a:off x="640080" y="3977640"/>
+            <a:ext cx="3440521" cy="274320"/>
+          </a:xfrm>
+          <a:prstGeom prst="rect">
+            <a:avLst/>
+          </a:prstGeom>
+          <a:noFill/>
+          <a:ln/>
+        </p:spPr>
+        <p:txBody>
+          <a:bodyPr wrap="square" rtlCol="0" anchor="ctr"/>
+          <a:lstStyle/>
+          <a:p>
+            <a:pPr algn="ctr" indent="0" marL="0">
+              <a:buNone/>
+            </a:pPr>
+            <a:r>
+              <a:rPr lang="en-US" sz="1100" b="1" spc="200" kern="0" dirty="0">
+                <a:solidFill>
+                  <a:srgbClr val="5A8FB0"/>
+                </a:solidFill>
+                <a:latin typeface="Calibri" pitchFamily="34" charset="0"/>
+                <a:ea typeface="Calibri" pitchFamily="34" charset="-122"/>
+                <a:cs typeface="Calibri" pitchFamily="34" charset="-120"/>
+              </a:rPr>
+              <a:t>EDGE</a:t>
+            </a:r>
+            <a:endParaRPr lang="en-US" sz="1100" dirty="0"/>
+          </a:p>
+        </p:txBody>
+      </p:sp>
+      <p:sp>
+        <p:nvSpPr>
+          <p:cNvPr id="33" name="Text 31"/>
+          <p:cNvSpPr/>
+          <p:nvPr/>
+        </p:nvSpPr>
+        <p:spPr>
+          <a:xfrm>
+            <a:off x="4375587" y="3977640"/>
+            <a:ext cx="7176028" cy="274320"/>
+          </a:xfrm>
+          <a:prstGeom prst="rect">
+            <a:avLst/>
+          </a:prstGeom>
+          <a:noFill/>
+          <a:ln/>
+        </p:spPr>
+        <p:txBody>
+          <a:bodyPr wrap="square" rtlCol="0" anchor="ctr"/>
+          <a:lstStyle/>
+          <a:p>
+            <a:pPr algn="ctr" indent="0" marL="0">
+              <a:buNone/>
+            </a:pPr>
+            <a:r>
+              <a:rPr lang="en-US" sz="1100" b="1" spc="200" kern="0" dirty="0">
+                <a:solidFill>
+                  <a:srgbClr val="1C4A6E"/>
+                </a:solidFill>
+                <a:latin typeface="Calibri" pitchFamily="34" charset="0"/>
+                <a:ea typeface="Calibri" pitchFamily="34" charset="-122"/>
+                <a:cs typeface="Calibri" pitchFamily="34" charset="-120"/>
+              </a:rPr>
+              <a:t>CLOUD</a:t>
+            </a:r>
+            <a:endParaRPr lang="en-US" sz="1100" dirty="0"/>
+          </a:p>
+        </p:txBody>
+      </p:sp>
+      <p:sp>
+        <p:nvSpPr>
+          <p:cNvPr id="34" name="Text 32"/>
           <p:cNvSpPr/>
           <p:nvPr/>
         </p:nvSpPr>
@@ -3251,12 +3325,12 @@
         </p:nvSpPr>
         <p:spPr>
           <a:xfrm>
-            <a:off x="640080" y="1874520"/>
-            <a:ext cx="4937760" cy="4160520"/>
+            <a:off x="731520" y="1920240"/>
+            <a:ext cx="10698480" cy="1965960"/>
           </a:xfrm>
           <a:prstGeom prst="roundRect">
             <a:avLst>
-              <a:gd name="adj" fmla="val 2198"/>
+              <a:gd name="adj" fmla="val 4651"/>
             </a:avLst>
           </a:prstGeom>
           <a:solidFill>
@@ -3278,7 +3352,7 @@
         </p:nvSpPr>
         <p:spPr>
           <a:xfrm>
-            <a:off x="960120" y="2103120"/>
+            <a:off x="1005840" y="2103120"/>
             <a:ext cx="3657600" cy="457200"/>
           </a:xfrm>
           <a:prstGeom prst="rect">
@@ -3317,8 +3391,8 @@
         </p:nvSpPr>
         <p:spPr>
           <a:xfrm>
-            <a:off x="960120" y="2651760"/>
-            <a:ext cx="4343400" cy="3200400"/>
+            <a:off x="1005840" y="2578608"/>
+            <a:ext cx="9966960" cy="1188720"/>
           </a:xfrm>
           <a:prstGeom prst="rect">
             <a:avLst/>
@@ -3332,12 +3406,12 @@
           <a:p>
             <a:pPr indent="0" marL="0">
               <a:lnSpc>
-                <a:spcPct val="112000"/>
+                <a:spcPct val="105000"/>
               </a:lnSpc>
               <a:buNone/>
             </a:pPr>
             <a:r>
-              <a:rPr lang="en-US" sz="1350" dirty="0">
+              <a:rPr lang="en-US" sz="1300" dirty="0">
                 <a:solidFill>
                   <a:srgbClr val="14293A"/>
                 </a:solidFill>
@@ -3347,7 +3421,7 @@
               </a:rPr>
               <a:t>The FastAPI dashboard would not even start on Lambda, for two reasons at once: a dependency with a compiled native part had been packaged as the copy built on my Mac, which the Linux runtime cannot import; and a static-asset folder was mounted at import time even though that folder ships to S3, not into the function. Both are import-time failures that passed all 76 local tests.</a:t>
             </a:r>
-            <a:endParaRPr lang="en-US" sz="1350" dirty="0"/>
+            <a:endParaRPr lang="en-US" sz="1300" dirty="0"/>
           </a:p>
         </p:txBody>
       </p:sp>
@@ -3359,12 +3433,12 @@
         </p:nvSpPr>
         <p:spPr>
           <a:xfrm>
-            <a:off x="6611112" y="1874520"/>
-            <a:ext cx="4937760" cy="4160520"/>
+            <a:off x="731520" y="4041648"/>
+            <a:ext cx="10698480" cy="1965960"/>
           </a:xfrm>
           <a:prstGeom prst="roundRect">
             <a:avLst>
-              <a:gd name="adj" fmla="val 2198"/>
+              <a:gd name="adj" fmla="val 4651"/>
             </a:avLst>
           </a:prstGeom>
           <a:solidFill>
@@ -3386,7 +3460,7 @@
         </p:nvSpPr>
         <p:spPr>
           <a:xfrm>
-            <a:off x="6931152" y="2103120"/>
+            <a:off x="1005840" y="4224528"/>
             <a:ext cx="3657600" cy="457200"/>
           </a:xfrm>
           <a:prstGeom prst="rect">
@@ -3425,8 +3499,8 @@
         </p:nvSpPr>
         <p:spPr>
           <a:xfrm>
-            <a:off x="6931152" y="2651760"/>
-            <a:ext cx="4343400" cy="3200400"/>
+            <a:off x="1005840" y="4700016"/>
+            <a:ext cx="9966960" cy="1188720"/>
           </a:xfrm>
           <a:prstGeom prst="rect">
             <a:avLst/>
@@ -3440,12 +3514,12 @@
           <a:p>
             <a:pPr indent="0" marL="0">
               <a:lnSpc>
-                <a:spcPct val="112000"/>
+                <a:spcPct val="105000"/>
               </a:lnSpc>
               <a:buNone/>
             </a:pPr>
             <a:r>
-              <a:rPr lang="en-US" sz="1350" dirty="0">
+              <a:rPr lang="en-US" sz="1300" dirty="0">
                 <a:solidFill>
                   <a:srgbClr val="14293A"/>
                 </a:solidFill>
@@ -3455,29 +3529,9 @@
               </a:rPr>
               <a:t>The deployment package is now built against the Linux runtime's own platform so the native dependency matches, and the static mount is made tolerant of an absent folder. The dashboard returned healthy on the very first live poll.</a:t>
             </a:r>
-            <a:endParaRPr lang="en-US" sz="1350" dirty="0"/>
-          </a:p>
-        </p:txBody>
-      </p:sp>
-      <p:sp>
-        <p:nvSpPr>
-          <p:cNvPr id="9" name="Shape 7"/>
-          <p:cNvSpPr/>
-          <p:nvPr/>
-        </p:nvSpPr>
-        <p:spPr>
-          <a:xfrm>
-            <a:off x="5669280" y="3703320"/>
-            <a:ext cx="841248" cy="512064"/>
-          </a:xfrm>
-          <a:prstGeom prst="rightArrow">
-            <a:avLst/>
-          </a:prstGeom>
-          <a:solidFill>
-            <a:srgbClr val="1C4A6E"/>
-          </a:solidFill>
-          <a:ln/>
-        </p:spPr>
+            <a:endParaRPr lang="en-US" sz="1300" dirty="0"/>
+          </a:p>
+        </p:txBody>
       </p:sp>
     </p:spTree>
   </p:cSld>

--- a/ppt/SrinidhiVutkoori_X25173243_cold-chain-logistics.pptx
+++ b/ppt/SrinidhiVutkoori_X25173243_cold-chain-logistics.pptx
@@ -2714,12 +2714,12 @@
         </p:nvSpPr>
         <p:spPr>
           <a:xfrm>
-            <a:off x="640080" y="1874520"/>
-            <a:ext cx="3502152" cy="3657600"/>
+            <a:off x="640080" y="1828800"/>
+            <a:ext cx="10881360" cy="1371600"/>
           </a:xfrm>
           <a:prstGeom prst="roundRect">
             <a:avLst>
-              <a:gd name="adj" fmla="val 2611"/>
+              <a:gd name="adj" fmla="val 6667"/>
             </a:avLst>
           </a:prstGeom>
           <a:solidFill>
@@ -2741,8 +2741,8 @@
         </p:nvSpPr>
         <p:spPr>
           <a:xfrm>
-            <a:off x="914400" y="2194560"/>
-            <a:ext cx="640080" cy="640080"/>
+            <a:off x="960120" y="2203704"/>
+            <a:ext cx="621792" cy="621792"/>
           </a:xfrm>
           <a:prstGeom prst="ellipse">
             <a:avLst/>
@@ -2761,8 +2761,8 @@
         </p:nvSpPr>
         <p:spPr>
           <a:xfrm>
-            <a:off x="914400" y="2194560"/>
-            <a:ext cx="640080" cy="640080"/>
+            <a:off x="960120" y="2203704"/>
+            <a:ext cx="621792" cy="621792"/>
           </a:xfrm>
           <a:prstGeom prst="rect">
             <a:avLst/>
@@ -2778,7 +2778,7 @@
               <a:buNone/>
             </a:pPr>
             <a:r>
-              <a:rPr lang="en-US" sz="2400" b="1" dirty="0">
+              <a:rPr lang="en-US" sz="2200" b="1" dirty="0">
                 <a:solidFill>
                   <a:srgbClr val="FFFFFF"/>
                 </a:solidFill>
@@ -2788,7 +2788,7 @@
               </a:rPr>
               <a:t>1</a:t>
             </a:r>
-            <a:endParaRPr lang="en-US" sz="2400" dirty="0"/>
+            <a:endParaRPr lang="en-US" sz="2200" dirty="0"/>
           </a:p>
         </p:txBody>
       </p:sp>
@@ -2800,8 +2800,8 @@
         </p:nvSpPr>
         <p:spPr>
           <a:xfrm>
-            <a:off x="914400" y="3017520"/>
-            <a:ext cx="2953512" cy="822960"/>
+            <a:off x="1828800" y="2029968"/>
+            <a:ext cx="9418320" cy="411480"/>
           </a:xfrm>
           <a:prstGeom prst="rect">
             <a:avLst/>
@@ -2839,8 +2839,8 @@
         </p:nvSpPr>
         <p:spPr>
           <a:xfrm>
-            <a:off x="914400" y="3794760"/>
-            <a:ext cx="2953512" cy="1554480"/>
+            <a:off x="1828800" y="2450592"/>
+            <a:ext cx="9418320" cy="594360"/>
           </a:xfrm>
           <a:prstGeom prst="rect">
             <a:avLst/>
@@ -2881,12 +2881,12 @@
         </p:nvSpPr>
         <p:spPr>
           <a:xfrm>
-            <a:off x="4416552" y="1874520"/>
-            <a:ext cx="3502152" cy="3657600"/>
+            <a:off x="640080" y="3346704"/>
+            <a:ext cx="10881360" cy="1371600"/>
           </a:xfrm>
           <a:prstGeom prst="roundRect">
             <a:avLst>
-              <a:gd name="adj" fmla="val 2611"/>
+              <a:gd name="adj" fmla="val 6667"/>
             </a:avLst>
           </a:prstGeom>
           <a:solidFill>
@@ -2908,8 +2908,8 @@
         </p:nvSpPr>
         <p:spPr>
           <a:xfrm>
-            <a:off x="4690872" y="2194560"/>
-            <a:ext cx="640080" cy="640080"/>
+            <a:off x="960120" y="3721608"/>
+            <a:ext cx="621792" cy="621792"/>
           </a:xfrm>
           <a:prstGeom prst="ellipse">
             <a:avLst/>
@@ -2928,8 +2928,8 @@
         </p:nvSpPr>
         <p:spPr>
           <a:xfrm>
-            <a:off x="4690872" y="2194560"/>
-            <a:ext cx="640080" cy="640080"/>
+            <a:off x="960120" y="3721608"/>
+            <a:ext cx="621792" cy="621792"/>
           </a:xfrm>
           <a:prstGeom prst="rect">
             <a:avLst/>
@@ -2945,7 +2945,7 @@
               <a:buNone/>
             </a:pPr>
             <a:r>
-              <a:rPr lang="en-US" sz="2400" b="1" dirty="0">
+              <a:rPr lang="en-US" sz="2200" b="1" dirty="0">
                 <a:solidFill>
                   <a:srgbClr val="FFFFFF"/>
                 </a:solidFill>
@@ -2955,7 +2955,7 @@
               </a:rPr>
               <a:t>2</a:t>
             </a:r>
-            <a:endParaRPr lang="en-US" sz="2400" dirty="0"/>
+            <a:endParaRPr lang="en-US" sz="2200" dirty="0"/>
           </a:p>
         </p:txBody>
       </p:sp>
@@ -2967,8 +2967,8 @@
         </p:nvSpPr>
         <p:spPr>
           <a:xfrm>
-            <a:off x="4690872" y="3017520"/>
-            <a:ext cx="2953512" cy="822960"/>
+            <a:off x="1828800" y="3547872"/>
+            <a:ext cx="9418320" cy="411480"/>
           </a:xfrm>
           <a:prstGeom prst="rect">
             <a:avLst/>
@@ -3006,8 +3006,8 @@
         </p:nvSpPr>
         <p:spPr>
           <a:xfrm>
-            <a:off x="4690872" y="3794760"/>
-            <a:ext cx="2953512" cy="1554480"/>
+            <a:off x="1828800" y="3968496"/>
+            <a:ext cx="9418320" cy="594360"/>
           </a:xfrm>
           <a:prstGeom prst="rect">
             <a:avLst/>
@@ -3048,12 +3048,12 @@
         </p:nvSpPr>
         <p:spPr>
           <a:xfrm>
-            <a:off x="8193024" y="1874520"/>
-            <a:ext cx="3502152" cy="3657600"/>
+            <a:off x="640080" y="4864608"/>
+            <a:ext cx="10881360" cy="1371600"/>
           </a:xfrm>
           <a:prstGeom prst="roundRect">
             <a:avLst>
-              <a:gd name="adj" fmla="val 2611"/>
+              <a:gd name="adj" fmla="val 6667"/>
             </a:avLst>
           </a:prstGeom>
           <a:solidFill>
@@ -3075,8 +3075,8 @@
         </p:nvSpPr>
         <p:spPr>
           <a:xfrm>
-            <a:off x="8467344" y="2194560"/>
-            <a:ext cx="640080" cy="640080"/>
+            <a:off x="960120" y="5239512"/>
+            <a:ext cx="621792" cy="621792"/>
           </a:xfrm>
           <a:prstGeom prst="ellipse">
             <a:avLst/>
@@ -3095,8 +3095,8 @@
         </p:nvSpPr>
         <p:spPr>
           <a:xfrm>
-            <a:off x="8467344" y="2194560"/>
-            <a:ext cx="640080" cy="640080"/>
+            <a:off x="960120" y="5239512"/>
+            <a:ext cx="621792" cy="621792"/>
           </a:xfrm>
           <a:prstGeom prst="rect">
             <a:avLst/>
@@ -3112,7 +3112,7 @@
               <a:buNone/>
             </a:pPr>
             <a:r>
-              <a:rPr lang="en-US" sz="2400" b="1" dirty="0">
+              <a:rPr lang="en-US" sz="2200" b="1" dirty="0">
                 <a:solidFill>
                   <a:srgbClr val="FFFFFF"/>
                 </a:solidFill>
@@ -3122,7 +3122,7 @@
               </a:rPr>
               <a:t>3</a:t>
             </a:r>
-            <a:endParaRPr lang="en-US" sz="2400" dirty="0"/>
+            <a:endParaRPr lang="en-US" sz="2200" dirty="0"/>
           </a:p>
         </p:txBody>
       </p:sp>
@@ -3134,8 +3134,8 @@
         </p:nvSpPr>
         <p:spPr>
           <a:xfrm>
-            <a:off x="8467344" y="3017520"/>
-            <a:ext cx="2953512" cy="822960"/>
+            <a:off x="1828800" y="5065776"/>
+            <a:ext cx="9418320" cy="411480"/>
           </a:xfrm>
           <a:prstGeom prst="rect">
             <a:avLst/>
@@ -3173,8 +3173,8 @@
         </p:nvSpPr>
         <p:spPr>
           <a:xfrm>
-            <a:off x="8467344" y="3794760"/>
-            <a:ext cx="2953512" cy="1554480"/>
+            <a:off x="1828800" y="5486400"/>
+            <a:ext cx="9418320" cy="594360"/>
           </a:xfrm>
           <a:prstGeom prst="rect">
             <a:avLst/>
@@ -3202,45 +3202,6 @@
                 <a:cs typeface="Calibri" pitchFamily="34" charset="-120"/>
               </a:rPr>
               <a:t>The storage-temperature charts show each container's live series, so a container drifting warm is visible before it breaches.</a:t>
-            </a:r>
-            <a:endParaRPr lang="en-US" sz="1300" dirty="0"/>
-          </a:p>
-        </p:txBody>
-      </p:sp>
-      <p:sp>
-        <p:nvSpPr>
-          <p:cNvPr id="19" name="Text 17"/>
-          <p:cNvSpPr/>
-          <p:nvPr/>
-        </p:nvSpPr>
-        <p:spPr>
-          <a:xfrm>
-            <a:off x="640080" y="6263640"/>
-            <a:ext cx="10972800" cy="365760"/>
-          </a:xfrm>
-          <a:prstGeom prst="rect">
-            <a:avLst/>
-          </a:prstGeom>
-          <a:noFill/>
-          <a:ln/>
-        </p:spPr>
-        <p:txBody>
-          <a:bodyPr wrap="square" rtlCol="0" anchor="ctr"/>
-          <a:lstStyle/>
-          <a:p>
-            <a:pPr indent="0" marL="0">
-              <a:buNone/>
-            </a:pPr>
-            <a:r>
-              <a:rPr lang="en-US" sz="1300" i="1" dirty="0">
-                <a:solidFill>
-                  <a:srgbClr val="5A8FB0"/>
-                </a:solidFill>
-                <a:latin typeface="Calibri" pitchFamily="34" charset="0"/>
-                <a:ea typeface="Calibri" pitchFamily="34" charset="-122"/>
-                <a:cs typeface="Calibri" pitchFamily="34" charset="-120"/>
-              </a:rPr>
-              <a:t>Switch to the live dashboard here — backup video ready.</a:t>
             </a:r>
             <a:endParaRPr lang="en-US" sz="1300" dirty="0"/>
           </a:p>
@@ -3325,12 +3286,12 @@
         </p:nvSpPr>
         <p:spPr>
           <a:xfrm>
-            <a:off x="731520" y="1920240"/>
-            <a:ext cx="10698480" cy="1965960"/>
+            <a:off x="640080" y="1874520"/>
+            <a:ext cx="4937760" cy="4160520"/>
           </a:xfrm>
           <a:prstGeom prst="roundRect">
             <a:avLst>
-              <a:gd name="adj" fmla="val 4651"/>
+              <a:gd name="adj" fmla="val 2198"/>
             </a:avLst>
           </a:prstGeom>
           <a:solidFill>
@@ -3352,7 +3313,7 @@
         </p:nvSpPr>
         <p:spPr>
           <a:xfrm>
-            <a:off x="1005840" y="2103120"/>
+            <a:off x="960120" y="2103120"/>
             <a:ext cx="3657600" cy="457200"/>
           </a:xfrm>
           <a:prstGeom prst="rect">
@@ -3391,8 +3352,8 @@
         </p:nvSpPr>
         <p:spPr>
           <a:xfrm>
-            <a:off x="1005840" y="2578608"/>
-            <a:ext cx="9966960" cy="1188720"/>
+            <a:off x="960120" y="2651760"/>
+            <a:ext cx="4343400" cy="3200400"/>
           </a:xfrm>
           <a:prstGeom prst="rect">
             <a:avLst/>
@@ -3406,12 +3367,12 @@
           <a:p>
             <a:pPr indent="0" marL="0">
               <a:lnSpc>
-                <a:spcPct val="105000"/>
+                <a:spcPct val="112000"/>
               </a:lnSpc>
               <a:buNone/>
             </a:pPr>
             <a:r>
-              <a:rPr lang="en-US" sz="1300" dirty="0">
+              <a:rPr lang="en-US" sz="1350" dirty="0">
                 <a:solidFill>
                   <a:srgbClr val="14293A"/>
                 </a:solidFill>
@@ -3421,7 +3382,7 @@
               </a:rPr>
               <a:t>The FastAPI dashboard would not even start on Lambda, for two reasons at once: a dependency with a compiled native part had been packaged as the copy built on my Mac, which the Linux runtime cannot import; and a static-asset folder was mounted at import time even though that folder ships to S3, not into the function. Both are import-time failures that passed all 76 local tests.</a:t>
             </a:r>
-            <a:endParaRPr lang="en-US" sz="1300" dirty="0"/>
+            <a:endParaRPr lang="en-US" sz="1350" dirty="0"/>
           </a:p>
         </p:txBody>
       </p:sp>
@@ -3433,12 +3394,12 @@
         </p:nvSpPr>
         <p:spPr>
           <a:xfrm>
-            <a:off x="731520" y="4041648"/>
-            <a:ext cx="10698480" cy="1965960"/>
+            <a:off x="6611112" y="1874520"/>
+            <a:ext cx="4937760" cy="4160520"/>
           </a:xfrm>
           <a:prstGeom prst="roundRect">
             <a:avLst>
-              <a:gd name="adj" fmla="val 4651"/>
+              <a:gd name="adj" fmla="val 2198"/>
             </a:avLst>
           </a:prstGeom>
           <a:solidFill>
@@ -3460,7 +3421,7 @@
         </p:nvSpPr>
         <p:spPr>
           <a:xfrm>
-            <a:off x="1005840" y="4224528"/>
+            <a:off x="6931152" y="2103120"/>
             <a:ext cx="3657600" cy="457200"/>
           </a:xfrm>
           <a:prstGeom prst="rect">
@@ -3499,8 +3460,8 @@
         </p:nvSpPr>
         <p:spPr>
           <a:xfrm>
-            <a:off x="1005840" y="4700016"/>
-            <a:ext cx="9966960" cy="1188720"/>
+            <a:off x="6931152" y="2651760"/>
+            <a:ext cx="4343400" cy="3200400"/>
           </a:xfrm>
           <a:prstGeom prst="rect">
             <a:avLst/>
@@ -3514,12 +3475,12 @@
           <a:p>
             <a:pPr indent="0" marL="0">
               <a:lnSpc>
-                <a:spcPct val="105000"/>
+                <a:spcPct val="112000"/>
               </a:lnSpc>
               <a:buNone/>
             </a:pPr>
             <a:r>
-              <a:rPr lang="en-US" sz="1300" dirty="0">
+              <a:rPr lang="en-US" sz="1350" dirty="0">
                 <a:solidFill>
                   <a:srgbClr val="14293A"/>
                 </a:solidFill>
@@ -3529,9 +3490,29 @@
               </a:rPr>
               <a:t>The deployment package is now built against the Linux runtime's own platform so the native dependency matches, and the static mount is made tolerant of an absent folder. The dashboard returned healthy on the very first live poll.</a:t>
             </a:r>
-            <a:endParaRPr lang="en-US" sz="1300" dirty="0"/>
-          </a:p>
-        </p:txBody>
+            <a:endParaRPr lang="en-US" sz="1350" dirty="0"/>
+          </a:p>
+        </p:txBody>
+      </p:sp>
+      <p:sp>
+        <p:nvSpPr>
+          <p:cNvPr id="9" name="Shape 7"/>
+          <p:cNvSpPr/>
+          <p:nvPr/>
+        </p:nvSpPr>
+        <p:spPr>
+          <a:xfrm>
+            <a:off x="5669280" y="3703320"/>
+            <a:ext cx="841248" cy="512064"/>
+          </a:xfrm>
+          <a:prstGeom prst="rightArrow">
+            <a:avLst/>
+          </a:prstGeom>
+          <a:solidFill>
+            <a:srgbClr val="1C4A6E"/>
+          </a:solidFill>
+          <a:ln/>
+        </p:spPr>
       </p:sp>
     </p:spTree>
   </p:cSld>

--- a/ppt/SrinidhiVutkoori_X25173243_cold-chain-logistics.pptx
+++ b/ppt/SrinidhiVutkoori_X25173243_cold-chain-logistics.pptx
@@ -1169,7 +1169,7 @@
             <a:r>
               <a:rPr lang="en-US" sz="1400" b="1" spc="300" kern="0" dirty="0">
                 <a:solidFill>
-                  <a:srgbClr val="E1A93C"/>
+                  <a:srgbClr val="2E6C93"/>
                 </a:solidFill>
                 <a:latin typeface="Calibri" pitchFamily="34" charset="0"/>
                 <a:ea typeface="Calibri" pitchFamily="34" charset="-122"/>
@@ -1309,23 +1309,16 @@
         </p:nvSpPr>
         <p:spPr>
           <a:xfrm>
-            <a:off x="658368" y="5623560"/>
-            <a:ext cx="2651760" cy="566928"/>
-          </a:xfrm>
-          <a:prstGeom prst="roundRect">
-            <a:avLst>
-              <a:gd name="adj" fmla="val 50000"/>
-            </a:avLst>
-          </a:prstGeom>
-          <a:solidFill>
-            <a:srgbClr val="183246"/>
-          </a:solidFill>
-          <a:ln w="12700">
-            <a:solidFill>
-              <a:srgbClr val="E1A93C"/>
-            </a:solidFill>
-            <a:prstDash val="solid"/>
-          </a:ln>
+            <a:off x="658368" y="5769864"/>
+            <a:ext cx="146304" cy="146304"/>
+          </a:xfrm>
+          <a:prstGeom prst="rect">
+            <a:avLst/>
+          </a:prstGeom>
+          <a:solidFill>
+            <a:srgbClr val="2E6C93"/>
+          </a:solidFill>
+          <a:ln/>
         </p:spPr>
       </p:sp>
       <p:sp>
@@ -1336,8 +1329,8 @@
         </p:nvSpPr>
         <p:spPr>
           <a:xfrm>
-            <a:off x="658368" y="5623560"/>
-            <a:ext cx="2651760" cy="566928"/>
+            <a:off x="932688" y="5623560"/>
+            <a:ext cx="2560320" cy="457200"/>
           </a:xfrm>
           <a:prstGeom prst="rect">
             <a:avLst/>
@@ -1349,13 +1342,13 @@
           <a:bodyPr wrap="square" lIns="0" tIns="0" rIns="0" bIns="0" rtlCol="0" anchor="ctr"/>
           <a:lstStyle/>
           <a:p>
-            <a:pPr algn="ctr" indent="0" marL="0">
-              <a:buNone/>
-            </a:pPr>
-            <a:r>
-              <a:rPr lang="en-US" sz="1350" b="1" dirty="0">
-                <a:solidFill>
-                  <a:srgbClr val="E1A93C"/>
+            <a:pPr indent="0" marL="0">
+              <a:buNone/>
+            </a:pPr>
+            <a:r>
+              <a:rPr lang="en-US" sz="1400" b="1" dirty="0">
+                <a:solidFill>
+                  <a:srgbClr val="CFE0EC"/>
                 </a:solidFill>
                 <a:latin typeface="Calibri" pitchFamily="34" charset="0"/>
                 <a:ea typeface="Calibri" pitchFamily="34" charset="-122"/>
@@ -1363,7 +1356,7 @@
               </a:rPr>
               <a:t>Storage temp &gt; −15 °C</a:t>
             </a:r>
-            <a:endParaRPr lang="en-US" sz="1350" dirty="0"/>
+            <a:endParaRPr lang="en-US" sz="1400" dirty="0"/>
           </a:p>
         </p:txBody>
       </p:sp>
@@ -1375,23 +1368,16 @@
         </p:nvSpPr>
         <p:spPr>
           <a:xfrm>
-            <a:off x="3538728" y="5623560"/>
-            <a:ext cx="2651760" cy="566928"/>
-          </a:xfrm>
-          <a:prstGeom prst="roundRect">
-            <a:avLst>
-              <a:gd name="adj" fmla="val 50000"/>
-            </a:avLst>
-          </a:prstGeom>
-          <a:solidFill>
-            <a:srgbClr val="183246"/>
-          </a:solidFill>
-          <a:ln w="12700">
-            <a:solidFill>
-              <a:srgbClr val="E1A93C"/>
-            </a:solidFill>
-            <a:prstDash val="solid"/>
-          </a:ln>
+            <a:off x="3538728" y="5769864"/>
+            <a:ext cx="146304" cy="146304"/>
+          </a:xfrm>
+          <a:prstGeom prst="rect">
+            <a:avLst/>
+          </a:prstGeom>
+          <a:solidFill>
+            <a:srgbClr val="2E6C93"/>
+          </a:solidFill>
+          <a:ln/>
         </p:spPr>
       </p:sp>
       <p:sp>
@@ -1402,8 +1388,8 @@
         </p:nvSpPr>
         <p:spPr>
           <a:xfrm>
-            <a:off x="3538728" y="5623560"/>
-            <a:ext cx="2651760" cy="566928"/>
+            <a:off x="3813048" y="5623560"/>
+            <a:ext cx="2560320" cy="457200"/>
           </a:xfrm>
           <a:prstGeom prst="rect">
             <a:avLst/>
@@ -1415,13 +1401,13 @@
           <a:bodyPr wrap="square" lIns="0" tIns="0" rIns="0" bIns="0" rtlCol="0" anchor="ctr"/>
           <a:lstStyle/>
           <a:p>
-            <a:pPr algn="ctr" indent="0" marL="0">
-              <a:buNone/>
-            </a:pPr>
-            <a:r>
-              <a:rPr lang="en-US" sz="1350" b="1" dirty="0">
-                <a:solidFill>
-                  <a:srgbClr val="E1A93C"/>
+            <a:pPr indent="0" marL="0">
+              <a:buNone/>
+            </a:pPr>
+            <a:r>
+              <a:rPr lang="en-US" sz="1400" b="1" dirty="0">
+                <a:solidFill>
+                  <a:srgbClr val="CFE0EC"/>
                 </a:solidFill>
                 <a:latin typeface="Calibri" pitchFamily="34" charset="0"/>
                 <a:ea typeface="Calibri" pitchFamily="34" charset="-122"/>
@@ -1429,7 +1415,7 @@
               </a:rPr>
               <a:t>Door open &gt; 300 s</a:t>
             </a:r>
-            <a:endParaRPr lang="en-US" sz="1350" dirty="0"/>
+            <a:endParaRPr lang="en-US" sz="1400" dirty="0"/>
           </a:p>
         </p:txBody>
       </p:sp>
@@ -1441,23 +1427,16 @@
         </p:nvSpPr>
         <p:spPr>
           <a:xfrm>
-            <a:off x="6419088" y="5623560"/>
-            <a:ext cx="2651760" cy="566928"/>
-          </a:xfrm>
-          <a:prstGeom prst="roundRect">
-            <a:avLst>
-              <a:gd name="adj" fmla="val 50000"/>
-            </a:avLst>
-          </a:prstGeom>
-          <a:solidFill>
-            <a:srgbClr val="183246"/>
-          </a:solidFill>
-          <a:ln w="12700">
-            <a:solidFill>
-              <a:srgbClr val="E1A93C"/>
-            </a:solidFill>
-            <a:prstDash val="solid"/>
-          </a:ln>
+            <a:off x="6419088" y="5769864"/>
+            <a:ext cx="146304" cy="146304"/>
+          </a:xfrm>
+          <a:prstGeom prst="rect">
+            <a:avLst/>
+          </a:prstGeom>
+          <a:solidFill>
+            <a:srgbClr val="2E6C93"/>
+          </a:solidFill>
+          <a:ln/>
         </p:spPr>
       </p:sp>
       <p:sp>
@@ -1468,8 +1447,8 @@
         </p:nvSpPr>
         <p:spPr>
           <a:xfrm>
-            <a:off x="6419088" y="5623560"/>
-            <a:ext cx="2651760" cy="566928"/>
+            <a:off x="6693408" y="5623560"/>
+            <a:ext cx="2560320" cy="457200"/>
           </a:xfrm>
           <a:prstGeom prst="rect">
             <a:avLst/>
@@ -1481,13 +1460,13 @@
           <a:bodyPr wrap="square" lIns="0" tIns="0" rIns="0" bIns="0" rtlCol="0" anchor="ctr"/>
           <a:lstStyle/>
           <a:p>
-            <a:pPr algn="ctr" indent="0" marL="0">
-              <a:buNone/>
-            </a:pPr>
-            <a:r>
-              <a:rPr lang="en-US" sz="1350" b="1" dirty="0">
-                <a:solidFill>
-                  <a:srgbClr val="E1A93C"/>
+            <a:pPr indent="0" marL="0">
+              <a:buNone/>
+            </a:pPr>
+            <a:r>
+              <a:rPr lang="en-US" sz="1400" b="1" dirty="0">
+                <a:solidFill>
+                  <a:srgbClr val="CFE0EC"/>
                 </a:solidFill>
                 <a:latin typeface="Calibri" pitchFamily="34" charset="0"/>
                 <a:ea typeface="Calibri" pitchFamily="34" charset="-122"/>
@@ -1495,7 +1474,7 @@
               </a:rPr>
               <a:t>10 s re-score</a:t>
             </a:r>
-            <a:endParaRPr lang="en-US" sz="1350" dirty="0"/>
+            <a:endParaRPr lang="en-US" sz="1400" dirty="0"/>
           </a:p>
         </p:txBody>
       </p:sp>
@@ -1523,17 +1502,6 @@
             <a:pPr indent="0" marL="0">
               <a:buNone/>
             </a:pPr>
-            <a:r>
-              <a:rPr lang="en-US" sz="1250" dirty="0">
-                <a:solidFill>
-                  <a:srgbClr val="5A6E7C"/>
-                </a:solidFill>
-                <a:latin typeface="Calibri" pitchFamily="34" charset="0"/>
-                <a:ea typeface="Calibri" pitchFamily="34" charset="-122"/>
-                <a:cs typeface="Calibri" pitchFamily="34" charset="-120"/>
-              </a:rPr>
-              <a:t>Fog &amp; Edge Computing (H9FECC)   ·   deployed live on AWS</a:t>
-            </a:r>
             <a:endParaRPr lang="en-US" sz="1250" dirty="0"/>
           </a:p>
         </p:txBody>
